--- a/03-build/pptx/C5_U7_docente.pptx
+++ b/03-build/pptx/C5_U7_docente.pptx
@@ -6645,7 +6645,6 @@
               <a:srgbClr val="E4E3DE"/>
             </a:solidFill>
           </a:ln>
-          <a:effectLst/>
           <a:effectLst>
             <a:outerShdw blurRad="90000" dist="38000" dir="5400000" rotWithShape="0">
               <a:srgbClr val="20242E">
@@ -6969,7 +6968,6 @@
               <a:srgbClr val="E4E3DE"/>
             </a:solidFill>
           </a:ln>
-          <a:effectLst/>
           <a:effectLst>
             <a:outerShdw blurRad="90000" dist="38000" dir="5400000" rotWithShape="0">
               <a:srgbClr val="20242E">
@@ -7293,7 +7291,6 @@
               <a:srgbClr val="E4E3DE"/>
             </a:solidFill>
           </a:ln>
-          <a:effectLst/>
           <a:effectLst>
             <a:outerShdw blurRad="90000" dist="38000" dir="5400000" rotWithShape="0">
               <a:srgbClr val="20242E">
@@ -7617,7 +7614,6 @@
               <a:srgbClr val="E4E3DE"/>
             </a:solidFill>
           </a:ln>
-          <a:effectLst/>
           <a:effectLst>
             <a:outerShdw blurRad="90000" dist="38000" dir="5400000" rotWithShape="0">
               <a:srgbClr val="20242E">
@@ -9472,7 +9468,6 @@
               <a:srgbClr val="1E9E74"/>
             </a:solidFill>
           </a:ln>
-          <a:effectLst/>
           <a:effectLst>
             <a:outerShdw blurRad="90000" dist="38000" dir="5400000" rotWithShape="0">
               <a:srgbClr val="20242E">
@@ -9617,7 +9612,6 @@
               <a:srgbClr val="1E9E74"/>
             </a:solidFill>
           </a:ln>
-          <a:effectLst/>
           <a:effectLst>
             <a:outerShdw blurRad="90000" dist="38000" dir="5400000" rotWithShape="0">
               <a:srgbClr val="20242E">
@@ -9762,7 +9756,6 @@
               <a:srgbClr val="1E9E74"/>
             </a:solidFill>
           </a:ln>
-          <a:effectLst/>
           <a:effectLst>
             <a:outerShdw blurRad="90000" dist="38000" dir="5400000" rotWithShape="0">
               <a:srgbClr val="20242E">
@@ -9907,7 +9900,6 @@
               <a:srgbClr val="1E9E74"/>
             </a:solidFill>
           </a:ln>
-          <a:effectLst/>
           <a:effectLst>
             <a:outerShdw blurRad="90000" dist="38000" dir="5400000" rotWithShape="0">
               <a:srgbClr val="20242E">
@@ -10052,7 +10044,6 @@
               <a:srgbClr val="1E9E74"/>
             </a:solidFill>
           </a:ln>
-          <a:effectLst/>
           <a:effectLst>
             <a:outerShdw blurRad="90000" dist="38000" dir="5400000" rotWithShape="0">
               <a:srgbClr val="20242E">
@@ -10197,7 +10188,6 @@
               <a:srgbClr val="1E9E74"/>
             </a:solidFill>
           </a:ln>
-          <a:effectLst/>
           <a:effectLst>
             <a:outerShdw blurRad="90000" dist="38000" dir="5400000" rotWithShape="0">
               <a:srgbClr val="20242E">
@@ -13701,7 +13691,6 @@
               <a:srgbClr val="E4E3DE"/>
             </a:solidFill>
           </a:ln>
-          <a:effectLst/>
           <a:effectLst>
             <a:outerShdw blurRad="90000" dist="38000" dir="5400000" rotWithShape="0">
               <a:srgbClr val="20242E">
@@ -14380,7 +14369,6 @@
               <a:srgbClr val="1E9E74"/>
             </a:solidFill>
           </a:ln>
-          <a:effectLst/>
           <a:effectLst>
             <a:outerShdw blurRad="90000" dist="38000" dir="5400000" rotWithShape="0">
               <a:srgbClr val="20242E">
@@ -21343,7 +21331,6 @@
               <a:srgbClr val="1E9E74"/>
             </a:solidFill>
           </a:ln>
-          <a:effectLst/>
           <a:effectLst>
             <a:outerShdw blurRad="90000" dist="38000" dir="5400000" rotWithShape="0">
               <a:srgbClr val="20242E">
@@ -21577,7 +21564,6 @@
               <a:srgbClr val="1E9E74"/>
             </a:solidFill>
           </a:ln>
-          <a:effectLst/>
           <a:effectLst>
             <a:outerShdw blurRad="90000" dist="38000" dir="5400000" rotWithShape="0">
               <a:srgbClr val="20242E">
@@ -21811,7 +21797,6 @@
               <a:srgbClr val="1E9E74"/>
             </a:solidFill>
           </a:ln>
-          <a:effectLst/>
           <a:effectLst>
             <a:outerShdw blurRad="90000" dist="38000" dir="5400000" rotWithShape="0">
               <a:srgbClr val="20242E">
@@ -29348,7 +29333,6 @@
               <a:srgbClr val="1E9E74"/>
             </a:solidFill>
           </a:ln>
-          <a:effectLst/>
           <a:effectLst>
             <a:outerShdw blurRad="90000" dist="38000" dir="5400000" rotWithShape="0">
               <a:srgbClr val="20242E">
@@ -29651,7 +29635,6 @@
               <a:srgbClr val="1E9E74"/>
             </a:solidFill>
           </a:ln>
-          <a:effectLst/>
           <a:effectLst>
             <a:outerShdw blurRad="90000" dist="38000" dir="5400000" rotWithShape="0">
               <a:srgbClr val="20242E">
@@ -29954,7 +29937,6 @@
               <a:srgbClr val="1E9E74"/>
             </a:solidFill>
           </a:ln>
-          <a:effectLst/>
           <a:effectLst>
             <a:outerShdw blurRad="90000" dist="38000" dir="5400000" rotWithShape="0">
               <a:srgbClr val="20242E">
@@ -30257,7 +30239,6 @@
               <a:srgbClr val="1E9E74"/>
             </a:solidFill>
           </a:ln>
-          <a:effectLst/>
           <a:effectLst>
             <a:outerShdw blurRad="90000" dist="38000" dir="5400000" rotWithShape="0">
               <a:srgbClr val="20242E">
@@ -30560,7 +30541,6 @@
               <a:srgbClr val="1E9E74"/>
             </a:solidFill>
           </a:ln>
-          <a:effectLst/>
           <a:effectLst>
             <a:outerShdw blurRad="90000" dist="38000" dir="5400000" rotWithShape="0">
               <a:srgbClr val="20242E">
@@ -30863,7 +30843,6 @@
               <a:srgbClr val="157355"/>
             </a:solidFill>
           </a:ln>
-          <a:effectLst/>
           <a:effectLst>
             <a:outerShdw blurRad="90000" dist="38000" dir="5400000" rotWithShape="0">
               <a:srgbClr val="20242E">
@@ -31166,7 +31145,6 @@
               <a:srgbClr val="157355"/>
             </a:solidFill>
           </a:ln>
-          <a:effectLst/>
           <a:effectLst>
             <a:outerShdw blurRad="90000" dist="38000" dir="5400000" rotWithShape="0">
               <a:srgbClr val="20242E">
@@ -31469,7 +31447,6 @@
               <a:srgbClr val="157355"/>
             </a:solidFill>
           </a:ln>
-          <a:effectLst/>
           <a:effectLst>
             <a:outerShdw blurRad="90000" dist="38000" dir="5400000" rotWithShape="0">
               <a:srgbClr val="20242E">
@@ -32296,7 +32273,6 @@
           <a:ln>
             <a:noFill/>
           </a:ln>
-          <a:effectLst/>
           <a:effectLst>
             <a:outerShdw blurRad="90000" dist="38000" dir="5400000" rotWithShape="0">
               <a:srgbClr val="20242E">
@@ -34009,7 +33985,6 @@
           <a:ln>
             <a:noFill/>
           </a:ln>
-          <a:effectLst/>
           <a:effectLst>
             <a:outerShdw blurRad="90000" dist="38000" dir="5400000" rotWithShape="0">
               <a:srgbClr val="20242E">
@@ -34152,7 +34127,6 @@
           <a:ln>
             <a:noFill/>
           </a:ln>
-          <a:effectLst/>
           <a:effectLst>
             <a:outerShdw blurRad="90000" dist="38000" dir="5400000" rotWithShape="0">
               <a:srgbClr val="20242E">
@@ -34295,7 +34269,6 @@
           <a:ln>
             <a:noFill/>
           </a:ln>
-          <a:effectLst/>
           <a:effectLst>
             <a:outerShdw blurRad="90000" dist="38000" dir="5400000" rotWithShape="0">
               <a:srgbClr val="20242E">
@@ -34438,7 +34411,6 @@
           <a:ln>
             <a:noFill/>
           </a:ln>
-          <a:effectLst/>
           <a:effectLst>
             <a:outerShdw blurRad="90000" dist="38000" dir="5400000" rotWithShape="0">
               <a:srgbClr val="20242E">
@@ -34581,7 +34553,6 @@
           <a:ln>
             <a:noFill/>
           </a:ln>
-          <a:effectLst/>
           <a:effectLst>
             <a:outerShdw blurRad="90000" dist="38000" dir="5400000" rotWithShape="0">
               <a:srgbClr val="20242E">
@@ -38841,7 +38812,6 @@
           <a:ln>
             <a:noFill/>
           </a:ln>
-          <a:effectLst/>
           <a:effectLst>
             <a:outerShdw blurRad="90000" dist="38000" dir="5400000" rotWithShape="0">
               <a:srgbClr val="20242E">
@@ -43184,7 +43154,6 @@
               <a:srgbClr val="1E9E74"/>
             </a:solidFill>
           </a:ln>
-          <a:effectLst/>
           <a:effectLst>
             <a:outerShdw blurRad="90000" dist="38000" dir="5400000" rotWithShape="0">
               <a:srgbClr val="20242E">
@@ -43329,7 +43298,6 @@
               <a:srgbClr val="1E9E74"/>
             </a:solidFill>
           </a:ln>
-          <a:effectLst/>
           <a:effectLst>
             <a:outerShdw blurRad="90000" dist="38000" dir="5400000" rotWithShape="0">
               <a:srgbClr val="20242E">
@@ -43474,7 +43442,6 @@
               <a:srgbClr val="1E9E74"/>
             </a:solidFill>
           </a:ln>
-          <a:effectLst/>
           <a:effectLst>
             <a:outerShdw blurRad="90000" dist="38000" dir="5400000" rotWithShape="0">
               <a:srgbClr val="20242E">
@@ -43619,7 +43586,6 @@
               <a:srgbClr val="1E9E74"/>
             </a:solidFill>
           </a:ln>
-          <a:effectLst/>
           <a:effectLst>
             <a:outerShdw blurRad="90000" dist="38000" dir="5400000" rotWithShape="0">
               <a:srgbClr val="20242E">
@@ -43764,7 +43730,6 @@
               <a:srgbClr val="1E9E74"/>
             </a:solidFill>
           </a:ln>
-          <a:effectLst/>
           <a:effectLst>
             <a:outerShdw blurRad="90000" dist="38000" dir="5400000" rotWithShape="0">
               <a:srgbClr val="20242E">
@@ -43909,7 +43874,6 @@
               <a:srgbClr val="1E9E74"/>
             </a:solidFill>
           </a:ln>
-          <a:effectLst/>
           <a:effectLst>
             <a:outerShdw blurRad="90000" dist="38000" dir="5400000" rotWithShape="0">
               <a:srgbClr val="20242E">
@@ -44054,7 +44018,6 @@
               <a:srgbClr val="1E9E74"/>
             </a:solidFill>
           </a:ln>
-          <a:effectLst/>
           <a:effectLst>
             <a:outerShdw blurRad="90000" dist="38000" dir="5400000" rotWithShape="0">
               <a:srgbClr val="20242E">
@@ -44199,7 +44162,6 @@
               <a:srgbClr val="1E9E74"/>
             </a:solidFill>
           </a:ln>
-          <a:effectLst/>
           <a:effectLst>
             <a:outerShdw blurRad="90000" dist="38000" dir="5400000" rotWithShape="0">
               <a:srgbClr val="20242E">
@@ -44344,7 +44306,6 @@
               <a:srgbClr val="1E9E74"/>
             </a:solidFill>
           </a:ln>
-          <a:effectLst/>
           <a:effectLst>
             <a:outerShdw blurRad="90000" dist="38000" dir="5400000" rotWithShape="0">
               <a:srgbClr val="20242E">
@@ -48138,7 +48099,6 @@
               <a:srgbClr val="1E9E74"/>
             </a:solidFill>
           </a:ln>
-          <a:effectLst/>
           <a:effectLst>
             <a:outerShdw blurRad="90000" dist="38000" dir="5400000" rotWithShape="0">
               <a:srgbClr val="20242E">
@@ -48293,7 +48253,6 @@
               <a:srgbClr val="1E9E74"/>
             </a:solidFill>
           </a:ln>
-          <a:effectLst/>
           <a:effectLst>
             <a:outerShdw blurRad="90000" dist="38000" dir="5400000" rotWithShape="0">
               <a:srgbClr val="20242E">
@@ -48448,7 +48407,6 @@
               <a:srgbClr val="1E9E74"/>
             </a:solidFill>
           </a:ln>
-          <a:effectLst/>
           <a:effectLst>
             <a:outerShdw blurRad="90000" dist="38000" dir="5400000" rotWithShape="0">
               <a:srgbClr val="20242E">
@@ -48603,7 +48561,6 @@
               <a:srgbClr val="1E9E74"/>
             </a:solidFill>
           </a:ln>
-          <a:effectLst/>
           <a:effectLst>
             <a:outerShdw blurRad="90000" dist="38000" dir="5400000" rotWithShape="0">
               <a:srgbClr val="20242E">
@@ -48758,7 +48715,6 @@
               <a:srgbClr val="1E9E74"/>
             </a:solidFill>
           </a:ln>
-          <a:effectLst/>
           <a:effectLst>
             <a:outerShdw blurRad="90000" dist="38000" dir="5400000" rotWithShape="0">
               <a:srgbClr val="20242E">
@@ -48913,7 +48869,6 @@
               <a:srgbClr val="1E9E74"/>
             </a:solidFill>
           </a:ln>
-          <a:effectLst/>
           <a:effectLst>
             <a:outerShdw blurRad="90000" dist="38000" dir="5400000" rotWithShape="0">
               <a:srgbClr val="20242E">
@@ -50453,7 +50408,6 @@
               <a:srgbClr val="1E9E74"/>
             </a:solidFill>
           </a:ln>
-          <a:effectLst/>
           <a:effectLst>
             <a:outerShdw blurRad="90000" dist="38000" dir="5400000" rotWithShape="0">
               <a:srgbClr val="20242E">

--- a/03-build/pptx/C5_U7_docente.pptx
+++ b/03-build/pptx/C5_U7_docente.pptx
@@ -11,6 +11,9 @@
     <p:sldId id="259" r:id="rId11"/>
     <p:sldId id="260" r:id="rId12"/>
     <p:sldId id="261" r:id="rId13"/>
+    <p:sldId id="277" r:id="rId29"/>
+    <p:sldId id="278" r:id="rId30"/>
+    <p:sldId id="279" r:id="rId31"/>
     <p:sldId id="262" r:id="rId14"/>
     <p:sldId id="263" r:id="rId15"/>
     <p:sldId id="264" r:id="rId16"/>
@@ -1551,6 +1554,255 @@
           </p:nvPr>
         </p:nvSpPr>
         <p:spPr/>
+      </p:sp>
+    </p:spTree>
+  </p:cSld>
+  <p:clrMapOvr>
+    <a:masterClrMapping/>
+  </p:clrMapOvr>
+</p:notes>
+</file>
+
+<file path=ppt/notesSlides/notesSlide22.xml><?xml version="1.0" encoding="utf-8"?>
+<p:notes xmlns:a="http://schemas.openxmlformats.org/drawingml/2006/main" xmlns:p="http://schemas.openxmlformats.org/presentationml/2006/main" xmlns:r="http://schemas.openxmlformats.org/officeDocument/2006/relationships">
+  <p:cSld>
+    <p:spTree>
+      <p:nvGrpSpPr>
+        <p:cNvPr id="1" name=""/>
+        <p:cNvGrpSpPr/>
+        <p:nvPr/>
+      </p:nvGrpSpPr>
+      <p:grpSpPr>
+        <a:xfrm>
+          <a:off x="0" y="0"/>
+          <a:ext cx="0" cy="0"/>
+          <a:chOff x="0" y="0"/>
+          <a:chExt cx="0" cy="0"/>
+        </a:xfrm>
+      </p:grpSpPr>
+      <p:sp>
+        <p:nvSpPr>
+          <p:cNvPr id="2" name="Slide Image Placeholder 1"/>
+          <p:cNvSpPr>
+            <a:spLocks noGrp="1"/>
+          </p:cNvSpPr>
+          <p:nvPr>
+            <p:ph type="sldImg" idx="2"/>
+          </p:nvPr>
+        </p:nvSpPr>
+        <p:spPr/>
+      </p:sp>
+      <p:sp>
+        <p:nvSpPr>
+          <p:cNvPr id="3" name="Notes Placeholder 2"/>
+          <p:cNvSpPr>
+            <a:spLocks noGrp="1"/>
+          </p:cNvSpPr>
+          <p:nvPr>
+            <p:ph type="body" idx="3" sz="quarter"/>
+          </p:nvPr>
+        </p:nvSpPr>
+        <p:spPr/>
+        <p:txBody>
+          <a:bodyPr/>
+          <a:lstStyle/>
+          <a:p>
+            <a:r>
+              <a:t>RETO 3 · Urbanistas por un día — ⚖️ onderhandeling &amp; dilemma</a:t>
+            </a:r>
+          </a:p>
+          <a:p>
+            <a:r>
+              <a:t>OPDRACHT: Kies wat jullie bouwen en verdedig waarom wél het park en niet de parking.</a:t>
+            </a:r>
+          </a:p>
+          <a:p>
+            <a:r>
+              <a:t>DE REGEL: Twaalf punten, geen dertien. Elke keuze wordt verdedigd met «hay que…» of «es importante porque…» — een keuze zonder reden wordt geschrapt door de klas.</a:t>
+            </a:r>
+          </a:p>
+          <a:p>
+            <a:r>
+              <a:t>VERLOOP: Mirad la manzana vacía y la lista de precios. | Negociad: doce puntos, ni uno más. | Colocad cada cosa en el plano y decid dónde está. | Defended vuestro barrio ante la clase. | La clase vota el barrio donde quiere vivir.</a:t>
+            </a:r>
+          </a:p>
+          <a:p>
+            <a:r>
+              <a:t>SLEUTEL: Twaalf punten dwingen tot een echt dilemma: woningen (5) plus school (4) laat maar drie punten over. Elke groep moet iets opgeven en dat hardop verantwoorden.  ||  De sterkste verdediging gebruikt plaatsbepaling: niet «wij hebben een park» maar «el parque está entre las viviendas y la escuela, para que los niños no crucen la calle».  ||  Toets de verdediging, niet de wijk. Er is geen juiste wijk; er is wel een wijk die in het Spaans overtuigend uitgelegd wordt.</a:t>
+            </a:r>
+          </a:p>
+          <a:p>
+            <a:r>
+              <a:t>NOTA: Sluit aan bij de Cultura-sectie over de plaza als hart van het barrio: de klas ontdekt zelf waarom die plek er is.</a:t>
+            </a:r>
+          </a:p>
+        </p:txBody>
+      </p:sp>
+    </p:spTree>
+  </p:cSld>
+  <p:clrMapOvr>
+    <a:masterClrMapping/>
+  </p:clrMapOvr>
+</p:notes>
+</file>
+
+<file path=ppt/notesSlides/notesSlide23.xml><?xml version="1.0" encoding="utf-8"?>
+<p:notes xmlns:a="http://schemas.openxmlformats.org/drawingml/2006/main" xmlns:p="http://schemas.openxmlformats.org/presentationml/2006/main" xmlns:r="http://schemas.openxmlformats.org/officeDocument/2006/relationships">
+  <p:cSld>
+    <p:spTree>
+      <p:nvGrpSpPr>
+        <p:cNvPr id="1" name=""/>
+        <p:cNvGrpSpPr/>
+        <p:nvPr/>
+      </p:nvGrpSpPr>
+      <p:grpSpPr>
+        <a:xfrm>
+          <a:off x="0" y="0"/>
+          <a:ext cx="0" cy="0"/>
+          <a:chOff x="0" y="0"/>
+          <a:chExt cx="0" cy="0"/>
+        </a:xfrm>
+      </p:grpSpPr>
+      <p:sp>
+        <p:nvSpPr>
+          <p:cNvPr id="2" name="Slide Image Placeholder 1"/>
+          <p:cNvSpPr>
+            <a:spLocks noGrp="1"/>
+          </p:cNvSpPr>
+          <p:nvPr>
+            <p:ph type="sldImg" idx="2"/>
+          </p:nvPr>
+        </p:nvSpPr>
+        <p:spPr/>
+      </p:sp>
+      <p:sp>
+        <p:nvSpPr>
+          <p:cNvPr id="3" name="Notes Placeholder 2"/>
+          <p:cNvSpPr>
+            <a:spLocks noGrp="1"/>
+          </p:cNvSpPr>
+          <p:nvPr>
+            <p:ph type="body" idx="3" sz="quarter"/>
+          </p:nvPr>
+        </p:nvSpPr>
+        <p:spPr/>
+        <p:txBody>
+          <a:bodyPr/>
+          <a:lstStyle/>
+          <a:p>
+            <a:r>
+              <a:t>RETO 7 · La casa del futuro sin futuro — ✍️ creatieve beperking</a:t>
+            </a:r>
+          </a:p>
+          <a:p>
+            <a:r>
+              <a:t>OPDRACHT: Beschrijf je huis van de toekomst enkel in het presente: en mi casa hay…</a:t>
+            </a:r>
+          </a:p>
+          <a:p>
+            <a:r>
+              <a:t>DE REGEL: Alles in de tegenwoordige tijd, alsof je er nu rondloopt. Geen «zal», geen «gaat zijn». Wél «hay», «está», «tiene» en «se puede».</a:t>
+            </a:r>
+          </a:p>
+          <a:p>
+            <a:r>
+              <a:t>VERLOOP: Piensa en tres cosas que hoy no existen. | Descríbelas como si estuvieran ahí ahora. | Di dónde está cada una. | Lee en voz alta. La clase busca un futuro escondido.</a:t>
+            </a:r>
+          </a:p>
+          <a:p>
+            <a:r>
+              <a:t>SLEUTEL: De beperking bewaakt de leerplangrens: futuro simple hoort niet in C5. Door de toekomst in het presente te beschrijven, is de oefening tegelijk creatief en conform.  ||  «Voy a tener» is de sluipweg — grammaticaal kent de klas hem uit U5, maar hij breekt de opdracht. Laat hem herformuleren naar «en mi casa hay».  ||  De sterkste teksten gebruiken plaatsbepaling: een huis beschrijven zonder «encima», «debajo» of «al lado» wordt een opsomming.</a:t>
+            </a:r>
+          </a:p>
+          <a:p>
+            <a:r>
+              <a:t>NOTA: Levert meteen materiaal voor de tarea final: wie zijn droomhuis kan beschrijven, beschrijft ook zijn echte barrio.</a:t>
+            </a:r>
+          </a:p>
+        </p:txBody>
+      </p:sp>
+    </p:spTree>
+  </p:cSld>
+  <p:clrMapOvr>
+    <a:masterClrMapping/>
+  </p:clrMapOvr>
+</p:notes>
+</file>
+
+<file path=ppt/notesSlides/notesSlide24.xml><?xml version="1.0" encoding="utf-8"?>
+<p:notes xmlns:a="http://schemas.openxmlformats.org/drawingml/2006/main" xmlns:p="http://schemas.openxmlformats.org/presentationml/2006/main" xmlns:r="http://schemas.openxmlformats.org/officeDocument/2006/relationships">
+  <p:cSld>
+    <p:spTree>
+      <p:nvGrpSpPr>
+        <p:cNvPr id="1" name=""/>
+        <p:cNvGrpSpPr/>
+        <p:nvPr/>
+      </p:nvGrpSpPr>
+      <p:grpSpPr>
+        <a:xfrm>
+          <a:off x="0" y="0"/>
+          <a:ext cx="0" cy="0"/>
+          <a:chOff x="0" y="0"/>
+          <a:chExt cx="0" cy="0"/>
+        </a:xfrm>
+      </p:grpSpPr>
+      <p:sp>
+        <p:nvSpPr>
+          <p:cNvPr id="2" name="Slide Image Placeholder 1"/>
+          <p:cNvSpPr>
+            <a:spLocks noGrp="1"/>
+          </p:cNvSpPr>
+          <p:nvPr>
+            <p:ph type="sldImg" idx="2"/>
+          </p:nvPr>
+        </p:nvSpPr>
+        <p:spPr/>
+      </p:sp>
+      <p:sp>
+        <p:nvSpPr>
+          <p:cNvPr id="3" name="Notes Placeholder 2"/>
+          <p:cNvSpPr>
+            <a:spLocks noGrp="1"/>
+          </p:cNvSpPr>
+          <p:nvPr>
+            <p:ph type="body" idx="3" sz="quarter"/>
+          </p:nvPr>
+        </p:nvSpPr>
+        <p:spPr/>
+        <p:txBody>
+          <a:bodyPr/>
+          <a:lstStyle/>
+          <a:p>
+            <a:r>
+              <a:t>RETO 8 · El vecino ruidoso — 🎭 simulatie met beperking</a:t>
+            </a:r>
+          </a:p>
+          <a:p>
+            <a:r>
+              <a:t>OPDRACHT: Schrijf beide briefjes. Allebei beleefd, elk met twee imperatieven.</a:t>
+            </a:r>
+          </a:p>
+          <a:p>
+            <a:r>
+              <a:t>DE REGEL: Geen scheldwoorden, geen dreigementen, geen uitroeptekens. Elke nota bevat twee imperatieven én één zin die de ander gelijk geeft («entiendo que…»).</a:t>
+            </a:r>
+          </a:p>
+          <a:p>
+            <a:r>
+              <a:t>VERLOOP: Leed la situación y elegid papel: vecino de arriba o de abajo. | Escribid vuestra nota. Educada, con dos imperativos. | Intercambiad las notas y contestad. | ¿Se resuelve? La clase decide qué nota funciona mejor.</a:t>
+            </a:r>
+          </a:p>
+          <a:p>
+            <a:r>
+              <a:t>SLEUTEL: De twee imperatieven en de begripszin zijn objectief te tellen — dat maakt de beleefdheid meetbaar in plaats van een gevoel.  ||  De sterkste briefjes gebruiken een imperatief als áánbod («llámame», «dime»), niet alleen als eis («baja la música»). Wijs daarop bij de nabespreking.  ||  Beide buren hebben gelijk: de drummer oefent, de nachtwerker slaapt. Er is geen schuldige — de opdracht is een oplossing, geen vonnis.</a:t>
+            </a:r>
+          </a:p>
+          <a:p>
+            <a:r>
+              <a:t>NOTA: Werkt uitstekend als échte briefwisseling: twee ronden heen en weer, en dan pas de klasbespreking.</a:t>
+            </a:r>
+          </a:p>
+        </p:txBody>
       </p:sp>
     </p:spTree>
   </p:cSld>
@@ -34857,6 +35109,4929 @@
                 <a:latin typeface="Inter"/>
               </a:rPr>
               <a:t>21</a:t>
+            </a:r>
+          </a:p>
+        </p:txBody>
+      </p:sp>
+    </p:spTree>
+  </p:cSld>
+  <p:clrMapOvr>
+    <a:masterClrMapping/>
+  </p:clrMapOvr>
+</p:sld>
+</file>
+
+<file path=ppt/slides/slide22.xml><?xml version="1.0" encoding="utf-8"?>
+<p:sld xmlns:a="http://schemas.openxmlformats.org/drawingml/2006/main" xmlns:p="http://schemas.openxmlformats.org/presentationml/2006/main" xmlns:r="http://schemas.openxmlformats.org/officeDocument/2006/relationships">
+  <p:cSld>
+    <p:spTree>
+      <p:nvGrpSpPr>
+        <p:cNvPr id="1" name=""/>
+        <p:cNvGrpSpPr/>
+        <p:nvPr/>
+      </p:nvGrpSpPr>
+      <p:grpSpPr/>
+      <p:sp>
+        <p:nvSpPr>
+          <p:cNvPr id="2" name="Fondo"/>
+          <p:cNvSpPr/>
+          <p:nvPr/>
+        </p:nvSpPr>
+        <p:spPr>
+          <a:xfrm>
+            <a:off x="0" y="0"/>
+            <a:ext cx="12191695" cy="6858000"/>
+          </a:xfrm>
+          <a:prstGeom prst="rect">
+            <a:avLst/>
+          </a:prstGeom>
+          <a:solidFill>
+            <a:srgbClr val="FCFBF8"/>
+          </a:solidFill>
+          <a:ln>
+            <a:noFill/>
+          </a:ln>
+          <a:effectLst/>
+        </p:spPr>
+        <p:style>
+          <a:lnRef idx="1">
+            <a:schemeClr val="accent1"/>
+          </a:lnRef>
+          <a:fillRef idx="3">
+            <a:schemeClr val="accent1"/>
+          </a:fillRef>
+          <a:effectRef idx="2">
+            <a:schemeClr val="accent1"/>
+          </a:effectRef>
+          <a:fontRef idx="minor">
+            <a:schemeClr val="lt1"/>
+          </a:fontRef>
+        </p:style>
+        <p:txBody>
+          <a:bodyPr rtlCol="0" anchor="ctr"/>
+          <a:lstStyle/>
+          <a:p/>
+        </p:txBody>
+      </p:sp>
+      <p:sp>
+        <p:nvSpPr>
+          <p:cNvPr id="3" name="Cabecera"/>
+          <p:cNvSpPr/>
+          <p:nvPr/>
+        </p:nvSpPr>
+        <p:spPr>
+          <a:xfrm>
+            <a:off x="0" y="0"/>
+            <a:ext cx="12191695" cy="1078992"/>
+          </a:xfrm>
+          <a:prstGeom prst="rect">
+            <a:avLst/>
+          </a:prstGeom>
+          <a:solidFill>
+            <a:srgbClr val="1E9E74"/>
+          </a:solidFill>
+          <a:ln>
+            <a:noFill/>
+          </a:ln>
+          <a:effectLst/>
+        </p:spPr>
+        <p:style>
+          <a:lnRef idx="1">
+            <a:schemeClr val="accent1"/>
+          </a:lnRef>
+          <a:fillRef idx="3">
+            <a:schemeClr val="accent1"/>
+          </a:fillRef>
+          <a:effectRef idx="2">
+            <a:schemeClr val="accent1"/>
+          </a:effectRef>
+          <a:fontRef idx="minor">
+            <a:schemeClr val="lt1"/>
+          </a:fontRef>
+        </p:style>
+        <p:txBody>
+          <a:bodyPr rtlCol="0" anchor="ctr"/>
+          <a:lstStyle/>
+          <a:p/>
+        </p:txBody>
+      </p:sp>
+      <p:sp>
+        <p:nvSpPr>
+          <p:cNvPr id="4" name="Chip"/>
+          <p:cNvSpPr/>
+          <p:nvPr/>
+        </p:nvSpPr>
+        <p:spPr>
+          <a:xfrm>
+            <a:off x="457200" y="182880"/>
+            <a:ext cx="3017520" cy="292608"/>
+          </a:xfrm>
+          <a:prstGeom prst="roundRect">
+            <a:avLst>
+              <a:gd name="adj" fmla="val 50000"/>
+            </a:avLst>
+          </a:prstGeom>
+          <a:solidFill>
+            <a:srgbClr val="FFFFFF"/>
+          </a:solidFill>
+          <a:ln>
+            <a:noFill/>
+          </a:ln>
+          <a:effectLst/>
+        </p:spPr>
+        <p:style>
+          <a:lnRef idx="1">
+            <a:schemeClr val="accent1"/>
+          </a:lnRef>
+          <a:fillRef idx="3">
+            <a:schemeClr val="accent1"/>
+          </a:fillRef>
+          <a:effectRef idx="2">
+            <a:schemeClr val="accent1"/>
+          </a:effectRef>
+          <a:fontRef idx="minor">
+            <a:schemeClr val="lt1"/>
+          </a:fontRef>
+        </p:style>
+        <p:txBody>
+          <a:bodyPr rtlCol="0" anchor="ctr"/>
+          <a:lstStyle/>
+          <a:p/>
+        </p:txBody>
+      </p:sp>
+      <p:sp>
+        <p:nvSpPr>
+          <p:cNvPr id="5" name="ChipTxt"/>
+          <p:cNvSpPr txBox="1"/>
+          <p:nvPr/>
+        </p:nvSpPr>
+        <p:spPr>
+          <a:xfrm>
+            <a:off x="457200" y="173736"/>
+            <a:ext cx="3017520" cy="310896"/>
+          </a:xfrm>
+          <a:prstGeom prst="rect">
+            <a:avLst/>
+          </a:prstGeom>
+          <a:noFill/>
+        </p:spPr>
+        <p:txBody>
+          <a:bodyPr wrap="square" anchor="ctr" lIns="45720" rIns="45720" tIns="27432" bIns="27432">
+            <a:normAutofit/>
+          </a:bodyPr>
+          <a:lstStyle/>
+          <a:p>
+            <a:pPr algn="ctr"/>
+            <a:r>
+              <a:rPr sz="950" b="1">
+                <a:solidFill>
+                  <a:srgbClr val="157355"/>
+                </a:solidFill>
+                <a:latin typeface="Inter"/>
+              </a:rPr>
+              <a:t>RETO 3 · ONDERHANDELING &amp; DILEMMA</a:t>
+            </a:r>
+          </a:p>
+        </p:txBody>
+      </p:sp>
+      <p:sp>
+        <p:nvSpPr>
+          <p:cNvPr id="6" name="Titulo"/>
+          <p:cNvSpPr txBox="1"/>
+          <p:nvPr/>
+        </p:nvSpPr>
+        <p:spPr>
+          <a:xfrm>
+            <a:off x="457200" y="502920"/>
+            <a:ext cx="8412480" cy="475488"/>
+          </a:xfrm>
+          <a:prstGeom prst="rect">
+            <a:avLst/>
+          </a:prstGeom>
+          <a:noFill/>
+        </p:spPr>
+        <p:txBody>
+          <a:bodyPr wrap="square" anchor="t" lIns="45720" rIns="45720" tIns="27432" bIns="27432">
+            <a:normAutofit/>
+          </a:bodyPr>
+          <a:lstStyle/>
+          <a:p>
+            <a:pPr algn="l"/>
+            <a:r>
+              <a:rPr sz="2700" b="1">
+                <a:solidFill>
+                  <a:srgbClr val="FFFFFF"/>
+                </a:solidFill>
+                <a:latin typeface="Bricolage Grotesque"/>
+              </a:rPr>
+              <a:t>Urbanistas por un día</a:t>
+            </a:r>
+          </a:p>
+        </p:txBody>
+      </p:sp>
+      <p:sp>
+        <p:nvSpPr>
+          <p:cNvPr id="7" name="Badges"/>
+          <p:cNvSpPr txBox="1"/>
+          <p:nvPr/>
+        </p:nvSpPr>
+        <p:spPr>
+          <a:xfrm>
+            <a:off x="9052560" y="256032"/>
+            <a:ext cx="2651760" cy="640080"/>
+          </a:xfrm>
+          <a:prstGeom prst="rect">
+            <a:avLst/>
+          </a:prstGeom>
+          <a:noFill/>
+        </p:spPr>
+        <p:txBody>
+          <a:bodyPr wrap="square" anchor="t" lIns="45720" rIns="45720" tIns="27432" bIns="27432">
+            <a:normAutofit/>
+          </a:bodyPr>
+          <a:lstStyle/>
+          <a:p>
+            <a:pPr algn="r"/>
+            <a:r>
+              <a:rPr sz="1000">
+                <a:solidFill>
+                  <a:srgbClr val="E4F4EE"/>
+                </a:solidFill>
+                <a:latin typeface="Inter"/>
+              </a:rPr>
+              <a:t>👨‍👩‍👧 En grupos</a:t>
+            </a:r>
+          </a:p>
+          <a:p>
+            <a:pPr algn="r"/>
+            <a:r>
+              <a:rPr sz="1000">
+                <a:solidFill>
+                  <a:srgbClr val="E4F4EE"/>
+                </a:solidFill>
+                <a:latin typeface="Inter"/>
+              </a:rPr>
+              <a:t>± 18 min · ★★★</a:t>
+            </a:r>
+          </a:p>
+        </p:txBody>
+      </p:sp>
+      <p:sp>
+        <p:nvSpPr>
+          <p:cNvPr id="8" name="Gancho"/>
+          <p:cNvSpPr txBox="1"/>
+          <p:nvPr/>
+        </p:nvSpPr>
+        <p:spPr>
+          <a:xfrm>
+            <a:off x="457200" y="1225296"/>
+            <a:ext cx="11274552" cy="566928"/>
+          </a:xfrm>
+          <a:prstGeom prst="rect">
+            <a:avLst/>
+          </a:prstGeom>
+          <a:noFill/>
+        </p:spPr>
+        <p:txBody>
+          <a:bodyPr wrap="square" anchor="t" lIns="45720" rIns="45720" tIns="27432" bIns="27432">
+            <a:normAutofit/>
+          </a:bodyPr>
+          <a:lstStyle/>
+          <a:p>
+            <a:pPr algn="l"/>
+            <a:r>
+              <a:rPr sz="1600" b="1">
+                <a:solidFill>
+                  <a:srgbClr val="157355"/>
+                </a:solidFill>
+                <a:latin typeface="Bricolage Grotesque"/>
+              </a:rPr>
+              <a:t>Una manzana vacía, doce puntos y un barrio que construir.</a:t>
+            </a:r>
+          </a:p>
+          <a:p>
+            <a:pPr algn="l"/>
+            <a:r>
+              <a:rPr sz="1100" i="1">
+                <a:solidFill>
+                  <a:srgbClr val="6A6E78"/>
+                </a:solidFill>
+                <a:latin typeface="Inter"/>
+              </a:rPr>
+              <a:t>Een leeg bouwblok, twaalf punten en een wijk om te bouwen.</a:t>
+            </a:r>
+          </a:p>
+        </p:txBody>
+      </p:sp>
+      <p:sp>
+        <p:nvSpPr>
+          <p:cNvPr id="9" name="ReglaCaja"/>
+          <p:cNvSpPr/>
+          <p:nvPr/>
+        </p:nvSpPr>
+        <p:spPr>
+          <a:xfrm>
+            <a:off x="457200" y="1847088"/>
+            <a:ext cx="11274552" cy="658368"/>
+          </a:xfrm>
+          <a:prstGeom prst="roundRect">
+            <a:avLst>
+              <a:gd name="adj" fmla="val 5000"/>
+            </a:avLst>
+          </a:prstGeom>
+          <a:solidFill>
+            <a:srgbClr val="FBF3D6"/>
+          </a:solidFill>
+          <a:ln>
+            <a:noFill/>
+          </a:ln>
+          <a:effectLst/>
+        </p:spPr>
+        <p:style>
+          <a:lnRef idx="1">
+            <a:schemeClr val="accent1"/>
+          </a:lnRef>
+          <a:fillRef idx="3">
+            <a:schemeClr val="accent1"/>
+          </a:fillRef>
+          <a:effectRef idx="2">
+            <a:schemeClr val="accent1"/>
+          </a:effectRef>
+          <a:fontRef idx="minor">
+            <a:schemeClr val="lt1"/>
+          </a:fontRef>
+        </p:style>
+        <p:txBody>
+          <a:bodyPr rtlCol="0" anchor="ctr"/>
+          <a:lstStyle/>
+          <a:p/>
+        </p:txBody>
+      </p:sp>
+      <p:sp>
+        <p:nvSpPr>
+          <p:cNvPr id="10" name="ReglaTxt"/>
+          <p:cNvSpPr txBox="1"/>
+          <p:nvPr/>
+        </p:nvSpPr>
+        <p:spPr>
+          <a:xfrm>
+            <a:off x="603504" y="1883664"/>
+            <a:ext cx="10972800" cy="585216"/>
+          </a:xfrm>
+          <a:prstGeom prst="rect">
+            <a:avLst/>
+          </a:prstGeom>
+          <a:noFill/>
+        </p:spPr>
+        <p:txBody>
+          <a:bodyPr wrap="square" anchor="t" lIns="45720" rIns="45720" tIns="27432" bIns="27432">
+            <a:normAutofit/>
+          </a:bodyPr>
+          <a:lstStyle/>
+          <a:p>
+            <a:pPr algn="l"/>
+            <a:r>
+              <a:rPr sz="850" b="1">
+                <a:solidFill>
+                  <a:srgbClr val="B7860B"/>
+                </a:solidFill>
+                <a:latin typeface="Inter"/>
+              </a:rPr>
+              <a:t>LA REGLA DEL RETO</a:t>
+            </a:r>
+          </a:p>
+          <a:p>
+            <a:pPr algn="l"/>
+            <a:r>
+              <a:rPr sz="1100">
+                <a:solidFill>
+                  <a:srgbClr val="20242E"/>
+                </a:solidFill>
+                <a:latin typeface="Inter"/>
+              </a:rPr>
+              <a:t>Twaalf punten, geen dertien. Elke keuze wordt verdedigd met «hay que…» of «es importante porque…» — een keuze zonder reden wordt geschrapt door de klas.</a:t>
+            </a:r>
+          </a:p>
+        </p:txBody>
+      </p:sp>
+      <p:sp>
+        <p:nvSpPr>
+          <p:cNvPr id="11" name="Tarjeta 0"/>
+          <p:cNvSpPr/>
+          <p:nvPr/>
+        </p:nvSpPr>
+        <p:spPr>
+          <a:xfrm>
+            <a:off x="457200" y="2670048"/>
+            <a:ext cx="2708910" cy="1170432"/>
+          </a:xfrm>
+          <a:prstGeom prst="roundRect">
+            <a:avLst>
+              <a:gd name="adj" fmla="val 6000"/>
+            </a:avLst>
+          </a:prstGeom>
+          <a:solidFill>
+            <a:srgbClr val="FFFFFF"/>
+          </a:solidFill>
+          <a:ln w="12700">
+            <a:solidFill>
+              <a:srgbClr val="E4E3DE"/>
+            </a:solidFill>
+          </a:ln>
+          <a:effectLst/>
+        </p:spPr>
+        <p:style>
+          <a:lnRef idx="1">
+            <a:schemeClr val="accent1"/>
+          </a:lnRef>
+          <a:fillRef idx="3">
+            <a:schemeClr val="accent1"/>
+          </a:fillRef>
+          <a:effectRef idx="2">
+            <a:schemeClr val="accent1"/>
+          </a:effectRef>
+          <a:fontRef idx="minor">
+            <a:schemeClr val="lt1"/>
+          </a:fontRef>
+        </p:style>
+        <p:txBody>
+          <a:bodyPr rtlCol="0" anchor="ctr"/>
+          <a:lstStyle/>
+          <a:p/>
+        </p:txBody>
+      </p:sp>
+      <p:sp>
+        <p:nvSpPr>
+          <p:cNvPr id="12" name="TarjetaTxt 0"/>
+          <p:cNvSpPr txBox="1"/>
+          <p:nvPr/>
+        </p:nvSpPr>
+        <p:spPr>
+          <a:xfrm>
+            <a:off x="548640" y="2724912"/>
+            <a:ext cx="2526030" cy="1060704"/>
+          </a:xfrm>
+          <a:prstGeom prst="rect">
+            <a:avLst/>
+          </a:prstGeom>
+          <a:noFill/>
+        </p:spPr>
+        <p:txBody>
+          <a:bodyPr wrap="square" anchor="t" lIns="45720" rIns="45720" tIns="27432" bIns="27432">
+            <a:normAutofit/>
+          </a:bodyPr>
+          <a:lstStyle/>
+          <a:p>
+            <a:pPr algn="l"/>
+            <a:r>
+              <a:rPr sz="1100" b="1">
+                <a:solidFill>
+                  <a:srgbClr val="157355"/>
+                </a:solidFill>
+                <a:latin typeface="Bricolage Grotesque"/>
+              </a:rPr>
+              <a:t>Precios</a:t>
+            </a:r>
+          </a:p>
+          <a:p>
+            <a:pPr algn="l"/>
+            <a:r>
+              <a:rPr sz="1000">
+                <a:solidFill>
+                  <a:srgbClr val="20242E"/>
+                </a:solidFill>
+                <a:latin typeface="Inter"/>
+              </a:rPr>
+              <a:t>un parque (4) · un parking (3) · un supermercado (3) · una escuela (4)</a:t>
+            </a:r>
+          </a:p>
+        </p:txBody>
+      </p:sp>
+      <p:sp>
+        <p:nvSpPr>
+          <p:cNvPr id="13" name="Tarjeta 1"/>
+          <p:cNvSpPr/>
+          <p:nvPr/>
+        </p:nvSpPr>
+        <p:spPr>
+          <a:xfrm>
+            <a:off x="3312414" y="2670048"/>
+            <a:ext cx="2708910" cy="1170432"/>
+          </a:xfrm>
+          <a:prstGeom prst="roundRect">
+            <a:avLst>
+              <a:gd name="adj" fmla="val 6000"/>
+            </a:avLst>
+          </a:prstGeom>
+          <a:solidFill>
+            <a:srgbClr val="FFFFFF"/>
+          </a:solidFill>
+          <a:ln w="12700">
+            <a:solidFill>
+              <a:srgbClr val="E4E3DE"/>
+            </a:solidFill>
+          </a:ln>
+          <a:effectLst/>
+        </p:spPr>
+        <p:style>
+          <a:lnRef idx="1">
+            <a:schemeClr val="accent1"/>
+          </a:lnRef>
+          <a:fillRef idx="3">
+            <a:schemeClr val="accent1"/>
+          </a:fillRef>
+          <a:effectRef idx="2">
+            <a:schemeClr val="accent1"/>
+          </a:effectRef>
+          <a:fontRef idx="minor">
+            <a:schemeClr val="lt1"/>
+          </a:fontRef>
+        </p:style>
+        <p:txBody>
+          <a:bodyPr rtlCol="0" anchor="ctr"/>
+          <a:lstStyle/>
+          <a:p/>
+        </p:txBody>
+      </p:sp>
+      <p:sp>
+        <p:nvSpPr>
+          <p:cNvPr id="14" name="TarjetaTxt 1"/>
+          <p:cNvSpPr txBox="1"/>
+          <p:nvPr/>
+        </p:nvSpPr>
+        <p:spPr>
+          <a:xfrm>
+            <a:off x="3403854" y="2724912"/>
+            <a:ext cx="2526030" cy="1060704"/>
+          </a:xfrm>
+          <a:prstGeom prst="rect">
+            <a:avLst/>
+          </a:prstGeom>
+          <a:noFill/>
+        </p:spPr>
+        <p:txBody>
+          <a:bodyPr wrap="square" anchor="t" lIns="45720" rIns="45720" tIns="27432" bIns="27432">
+            <a:normAutofit/>
+          </a:bodyPr>
+          <a:lstStyle/>
+          <a:p>
+            <a:pPr algn="l"/>
+            <a:r>
+              <a:rPr sz="1100" b="1">
+                <a:solidFill>
+                  <a:srgbClr val="157355"/>
+                </a:solidFill>
+                <a:latin typeface="Bricolage Grotesque"/>
+              </a:rPr>
+              <a:t>Precios</a:t>
+            </a:r>
+          </a:p>
+          <a:p>
+            <a:pPr algn="l"/>
+            <a:r>
+              <a:rPr sz="1000">
+                <a:solidFill>
+                  <a:srgbClr val="20242E"/>
+                </a:solidFill>
+                <a:latin typeface="Inter"/>
+              </a:rPr>
+              <a:t>un centro de salud (4) · una cancha de fútbol (2) · una biblioteca (3) · un mercado (3)</a:t>
+            </a:r>
+          </a:p>
+        </p:txBody>
+      </p:sp>
+      <p:sp>
+        <p:nvSpPr>
+          <p:cNvPr id="15" name="Tarjeta 2"/>
+          <p:cNvSpPr/>
+          <p:nvPr/>
+        </p:nvSpPr>
+        <p:spPr>
+          <a:xfrm>
+            <a:off x="6167628" y="2670048"/>
+            <a:ext cx="2708910" cy="1170432"/>
+          </a:xfrm>
+          <a:prstGeom prst="roundRect">
+            <a:avLst>
+              <a:gd name="adj" fmla="val 6000"/>
+            </a:avLst>
+          </a:prstGeom>
+          <a:solidFill>
+            <a:srgbClr val="FFFFFF"/>
+          </a:solidFill>
+          <a:ln w="12700">
+            <a:solidFill>
+              <a:srgbClr val="E4E3DE"/>
+            </a:solidFill>
+          </a:ln>
+          <a:effectLst/>
+        </p:spPr>
+        <p:style>
+          <a:lnRef idx="1">
+            <a:schemeClr val="accent1"/>
+          </a:lnRef>
+          <a:fillRef idx="3">
+            <a:schemeClr val="accent1"/>
+          </a:fillRef>
+          <a:effectRef idx="2">
+            <a:schemeClr val="accent1"/>
+          </a:effectRef>
+          <a:fontRef idx="minor">
+            <a:schemeClr val="lt1"/>
+          </a:fontRef>
+        </p:style>
+        <p:txBody>
+          <a:bodyPr rtlCol="0" anchor="ctr"/>
+          <a:lstStyle/>
+          <a:p/>
+        </p:txBody>
+      </p:sp>
+      <p:sp>
+        <p:nvSpPr>
+          <p:cNvPr id="16" name="TarjetaTxt 2"/>
+          <p:cNvSpPr txBox="1"/>
+          <p:nvPr/>
+        </p:nvSpPr>
+        <p:spPr>
+          <a:xfrm>
+            <a:off x="6259068" y="2724912"/>
+            <a:ext cx="2526030" cy="1060704"/>
+          </a:xfrm>
+          <a:prstGeom prst="rect">
+            <a:avLst/>
+          </a:prstGeom>
+          <a:noFill/>
+        </p:spPr>
+        <p:txBody>
+          <a:bodyPr wrap="square" anchor="t" lIns="45720" rIns="45720" tIns="27432" bIns="27432">
+            <a:normAutofit/>
+          </a:bodyPr>
+          <a:lstStyle/>
+          <a:p>
+            <a:pPr algn="l"/>
+            <a:r>
+              <a:rPr sz="1100" b="1">
+                <a:solidFill>
+                  <a:srgbClr val="157355"/>
+                </a:solidFill>
+                <a:latin typeface="Bricolage Grotesque"/>
+              </a:rPr>
+              <a:t>Precios</a:t>
+            </a:r>
+          </a:p>
+          <a:p>
+            <a:pPr algn="l"/>
+            <a:r>
+              <a:rPr sz="1000">
+                <a:solidFill>
+                  <a:srgbClr val="20242E"/>
+                </a:solidFill>
+                <a:latin typeface="Inter"/>
+              </a:rPr>
+              <a:t>viviendas (5) · una parada de bus (1) · una plaza con bancos (2) · un café (1)</a:t>
+            </a:r>
+          </a:p>
+        </p:txBody>
+      </p:sp>
+      <p:sp>
+        <p:nvSpPr>
+          <p:cNvPr id="17" name="Tarjeta 3"/>
+          <p:cNvSpPr/>
+          <p:nvPr/>
+        </p:nvSpPr>
+        <p:spPr>
+          <a:xfrm>
+            <a:off x="9022842" y="2670048"/>
+            <a:ext cx="2708910" cy="1170432"/>
+          </a:xfrm>
+          <a:prstGeom prst="roundRect">
+            <a:avLst>
+              <a:gd name="adj" fmla="val 6000"/>
+            </a:avLst>
+          </a:prstGeom>
+          <a:solidFill>
+            <a:srgbClr val="FFFFFF"/>
+          </a:solidFill>
+          <a:ln w="12700">
+            <a:solidFill>
+              <a:srgbClr val="E4E3DE"/>
+            </a:solidFill>
+          </a:ln>
+          <a:effectLst/>
+        </p:spPr>
+        <p:style>
+          <a:lnRef idx="1">
+            <a:schemeClr val="accent1"/>
+          </a:lnRef>
+          <a:fillRef idx="3">
+            <a:schemeClr val="accent1"/>
+          </a:fillRef>
+          <a:effectRef idx="2">
+            <a:schemeClr val="accent1"/>
+          </a:effectRef>
+          <a:fontRef idx="minor">
+            <a:schemeClr val="lt1"/>
+          </a:fontRef>
+        </p:style>
+        <p:txBody>
+          <a:bodyPr rtlCol="0" anchor="ctr"/>
+          <a:lstStyle/>
+          <a:p/>
+        </p:txBody>
+      </p:sp>
+      <p:sp>
+        <p:nvSpPr>
+          <p:cNvPr id="18" name="TarjetaTxt 3"/>
+          <p:cNvSpPr txBox="1"/>
+          <p:nvPr/>
+        </p:nvSpPr>
+        <p:spPr>
+          <a:xfrm>
+            <a:off x="9114282" y="2724912"/>
+            <a:ext cx="2526030" cy="1060704"/>
+          </a:xfrm>
+          <a:prstGeom prst="rect">
+            <a:avLst/>
+          </a:prstGeom>
+          <a:noFill/>
+        </p:spPr>
+        <p:txBody>
+          <a:bodyPr wrap="square" anchor="t" lIns="45720" rIns="45720" tIns="27432" bIns="27432">
+            <a:normAutofit/>
+          </a:bodyPr>
+          <a:lstStyle/>
+          <a:p>
+            <a:pPr algn="l"/>
+            <a:r>
+              <a:rPr sz="1100" b="1">
+                <a:solidFill>
+                  <a:srgbClr val="157355"/>
+                </a:solidFill>
+                <a:latin typeface="Bricolage Grotesque"/>
+              </a:rPr>
+              <a:t>marco</a:t>
+            </a:r>
+          </a:p>
+          <a:p>
+            <a:pPr algn="l"/>
+            <a:r>
+              <a:rPr sz="1000">
+                <a:solidFill>
+                  <a:srgbClr val="20242E"/>
+                </a:solidFill>
+                <a:latin typeface="Inter"/>
+              </a:rPr>
+              <a:t>Nosotros ponemos … porque …</a:t>
+            </a:r>
+          </a:p>
+        </p:txBody>
+      </p:sp>
+      <p:sp>
+        <p:nvSpPr>
+          <p:cNvPr id="19" name="Tarjeta 4"/>
+          <p:cNvSpPr/>
+          <p:nvPr/>
+        </p:nvSpPr>
+        <p:spPr>
+          <a:xfrm>
+            <a:off x="457200" y="3968496"/>
+            <a:ext cx="2708910" cy="1170432"/>
+          </a:xfrm>
+          <a:prstGeom prst="roundRect">
+            <a:avLst>
+              <a:gd name="adj" fmla="val 6000"/>
+            </a:avLst>
+          </a:prstGeom>
+          <a:solidFill>
+            <a:srgbClr val="FFFFFF"/>
+          </a:solidFill>
+          <a:ln w="12700">
+            <a:solidFill>
+              <a:srgbClr val="E4E3DE"/>
+            </a:solidFill>
+          </a:ln>
+          <a:effectLst/>
+        </p:spPr>
+        <p:style>
+          <a:lnRef idx="1">
+            <a:schemeClr val="accent1"/>
+          </a:lnRef>
+          <a:fillRef idx="3">
+            <a:schemeClr val="accent1"/>
+          </a:fillRef>
+          <a:effectRef idx="2">
+            <a:schemeClr val="accent1"/>
+          </a:effectRef>
+          <a:fontRef idx="minor">
+            <a:schemeClr val="lt1"/>
+          </a:fontRef>
+        </p:style>
+        <p:txBody>
+          <a:bodyPr rtlCol="0" anchor="ctr"/>
+          <a:lstStyle/>
+          <a:p/>
+        </p:txBody>
+      </p:sp>
+      <p:sp>
+        <p:nvSpPr>
+          <p:cNvPr id="20" name="TarjetaTxt 4"/>
+          <p:cNvSpPr txBox="1"/>
+          <p:nvPr/>
+        </p:nvSpPr>
+        <p:spPr>
+          <a:xfrm>
+            <a:off x="548640" y="4023360"/>
+            <a:ext cx="2526030" cy="1060704"/>
+          </a:xfrm>
+          <a:prstGeom prst="rect">
+            <a:avLst/>
+          </a:prstGeom>
+          <a:noFill/>
+        </p:spPr>
+        <p:txBody>
+          <a:bodyPr wrap="square" anchor="t" lIns="45720" rIns="45720" tIns="27432" bIns="27432">
+            <a:normAutofit/>
+          </a:bodyPr>
+          <a:lstStyle/>
+          <a:p>
+            <a:pPr algn="l"/>
+            <a:r>
+              <a:rPr sz="1100" b="1">
+                <a:solidFill>
+                  <a:srgbClr val="157355"/>
+                </a:solidFill>
+                <a:latin typeface="Bricolage Grotesque"/>
+              </a:rPr>
+              <a:t>marco</a:t>
+            </a:r>
+          </a:p>
+          <a:p>
+            <a:pPr algn="l"/>
+            <a:r>
+              <a:rPr sz="1000">
+                <a:solidFill>
+                  <a:srgbClr val="20242E"/>
+                </a:solidFill>
+                <a:latin typeface="Inter"/>
+              </a:rPr>
+              <a:t>Hay que tener … cerca de …</a:t>
+            </a:r>
+          </a:p>
+        </p:txBody>
+      </p:sp>
+      <p:sp>
+        <p:nvSpPr>
+          <p:cNvPr id="21" name="Tarjeta 5"/>
+          <p:cNvSpPr/>
+          <p:nvPr/>
+        </p:nvSpPr>
+        <p:spPr>
+          <a:xfrm>
+            <a:off x="3312414" y="3968496"/>
+            <a:ext cx="2708910" cy="1170432"/>
+          </a:xfrm>
+          <a:prstGeom prst="roundRect">
+            <a:avLst>
+              <a:gd name="adj" fmla="val 6000"/>
+            </a:avLst>
+          </a:prstGeom>
+          <a:solidFill>
+            <a:srgbClr val="FFFFFF"/>
+          </a:solidFill>
+          <a:ln w="12700">
+            <a:solidFill>
+              <a:srgbClr val="E4E3DE"/>
+            </a:solidFill>
+          </a:ln>
+          <a:effectLst/>
+        </p:spPr>
+        <p:style>
+          <a:lnRef idx="1">
+            <a:schemeClr val="accent1"/>
+          </a:lnRef>
+          <a:fillRef idx="3">
+            <a:schemeClr val="accent1"/>
+          </a:fillRef>
+          <a:effectRef idx="2">
+            <a:schemeClr val="accent1"/>
+          </a:effectRef>
+          <a:fontRef idx="minor">
+            <a:schemeClr val="lt1"/>
+          </a:fontRef>
+        </p:style>
+        <p:txBody>
+          <a:bodyPr rtlCol="0" anchor="ctr"/>
+          <a:lstStyle/>
+          <a:p/>
+        </p:txBody>
+      </p:sp>
+      <p:sp>
+        <p:nvSpPr>
+          <p:cNvPr id="22" name="TarjetaTxt 5"/>
+          <p:cNvSpPr txBox="1"/>
+          <p:nvPr/>
+        </p:nvSpPr>
+        <p:spPr>
+          <a:xfrm>
+            <a:off x="3403854" y="4023360"/>
+            <a:ext cx="2526030" cy="1060704"/>
+          </a:xfrm>
+          <a:prstGeom prst="rect">
+            <a:avLst/>
+          </a:prstGeom>
+          <a:noFill/>
+        </p:spPr>
+        <p:txBody>
+          <a:bodyPr wrap="square" anchor="t" lIns="45720" rIns="45720" tIns="27432" bIns="27432">
+            <a:normAutofit/>
+          </a:bodyPr>
+          <a:lstStyle/>
+          <a:p>
+            <a:pPr algn="l"/>
+            <a:r>
+              <a:rPr sz="1100" b="1">
+                <a:solidFill>
+                  <a:srgbClr val="157355"/>
+                </a:solidFill>
+                <a:latin typeface="Bricolage Grotesque"/>
+              </a:rPr>
+              <a:t>marco</a:t>
+            </a:r>
+          </a:p>
+          <a:p>
+            <a:pPr algn="l"/>
+            <a:r>
+              <a:rPr sz="1000">
+                <a:solidFill>
+                  <a:srgbClr val="20242E"/>
+                </a:solidFill>
+                <a:latin typeface="Inter"/>
+              </a:rPr>
+              <a:t>No hace falta …, ya hay uno en …</a:t>
+            </a:r>
+          </a:p>
+        </p:txBody>
+      </p:sp>
+      <p:sp>
+        <p:nvSpPr>
+          <p:cNvPr id="23" name="Tarjeta 6"/>
+          <p:cNvSpPr/>
+          <p:nvPr/>
+        </p:nvSpPr>
+        <p:spPr>
+          <a:xfrm>
+            <a:off x="6167628" y="3968496"/>
+            <a:ext cx="2708910" cy="1170432"/>
+          </a:xfrm>
+          <a:prstGeom prst="roundRect">
+            <a:avLst>
+              <a:gd name="adj" fmla="val 6000"/>
+            </a:avLst>
+          </a:prstGeom>
+          <a:solidFill>
+            <a:srgbClr val="FFFFFF"/>
+          </a:solidFill>
+          <a:ln w="12700">
+            <a:solidFill>
+              <a:srgbClr val="E4E3DE"/>
+            </a:solidFill>
+          </a:ln>
+          <a:effectLst/>
+        </p:spPr>
+        <p:style>
+          <a:lnRef idx="1">
+            <a:schemeClr val="accent1"/>
+          </a:lnRef>
+          <a:fillRef idx="3">
+            <a:schemeClr val="accent1"/>
+          </a:fillRef>
+          <a:effectRef idx="2">
+            <a:schemeClr val="accent1"/>
+          </a:effectRef>
+          <a:fontRef idx="minor">
+            <a:schemeClr val="lt1"/>
+          </a:fontRef>
+        </p:style>
+        <p:txBody>
+          <a:bodyPr rtlCol="0" anchor="ctr"/>
+          <a:lstStyle/>
+          <a:p/>
+        </p:txBody>
+      </p:sp>
+      <p:sp>
+        <p:nvSpPr>
+          <p:cNvPr id="24" name="TarjetaTxt 6"/>
+          <p:cNvSpPr txBox="1"/>
+          <p:nvPr/>
+        </p:nvSpPr>
+        <p:spPr>
+          <a:xfrm>
+            <a:off x="6259068" y="4023360"/>
+            <a:ext cx="2526030" cy="1060704"/>
+          </a:xfrm>
+          <a:prstGeom prst="rect">
+            <a:avLst/>
+          </a:prstGeom>
+          <a:noFill/>
+        </p:spPr>
+        <p:txBody>
+          <a:bodyPr wrap="square" anchor="t" lIns="45720" rIns="45720" tIns="27432" bIns="27432">
+            <a:normAutofit/>
+          </a:bodyPr>
+          <a:lstStyle/>
+          <a:p>
+            <a:pPr algn="l"/>
+            <a:r>
+              <a:rPr sz="1100" b="1">
+                <a:solidFill>
+                  <a:srgbClr val="157355"/>
+                </a:solidFill>
+                <a:latin typeface="Bricolage Grotesque"/>
+              </a:rPr>
+              <a:t>marco</a:t>
+            </a:r>
+          </a:p>
+          <a:p>
+            <a:pPr algn="l"/>
+            <a:r>
+              <a:rPr sz="1000">
+                <a:solidFill>
+                  <a:srgbClr val="20242E"/>
+                </a:solidFill>
+                <a:latin typeface="Inter"/>
+              </a:rPr>
+              <a:t>Es importante porque la gente …</a:t>
+            </a:r>
+          </a:p>
+        </p:txBody>
+      </p:sp>
+      <p:sp>
+        <p:nvSpPr>
+          <p:cNvPr id="25" name="Tarjeta 7"/>
+          <p:cNvSpPr/>
+          <p:nvPr/>
+        </p:nvSpPr>
+        <p:spPr>
+          <a:xfrm>
+            <a:off x="9022842" y="3968496"/>
+            <a:ext cx="2708910" cy="1170432"/>
+          </a:xfrm>
+          <a:prstGeom prst="roundRect">
+            <a:avLst>
+              <a:gd name="adj" fmla="val 6000"/>
+            </a:avLst>
+          </a:prstGeom>
+          <a:solidFill>
+            <a:srgbClr val="FFFFFF"/>
+          </a:solidFill>
+          <a:ln w="12700">
+            <a:solidFill>
+              <a:srgbClr val="E4E3DE"/>
+            </a:solidFill>
+          </a:ln>
+          <a:effectLst/>
+        </p:spPr>
+        <p:style>
+          <a:lnRef idx="1">
+            <a:schemeClr val="accent1"/>
+          </a:lnRef>
+          <a:fillRef idx="3">
+            <a:schemeClr val="accent1"/>
+          </a:fillRef>
+          <a:effectRef idx="2">
+            <a:schemeClr val="accent1"/>
+          </a:effectRef>
+          <a:fontRef idx="minor">
+            <a:schemeClr val="lt1"/>
+          </a:fontRef>
+        </p:style>
+        <p:txBody>
+          <a:bodyPr rtlCol="0" anchor="ctr"/>
+          <a:lstStyle/>
+          <a:p/>
+        </p:txBody>
+      </p:sp>
+      <p:sp>
+        <p:nvSpPr>
+          <p:cNvPr id="26" name="TarjetaTxt 7"/>
+          <p:cNvSpPr txBox="1"/>
+          <p:nvPr/>
+        </p:nvSpPr>
+        <p:spPr>
+          <a:xfrm>
+            <a:off x="9114282" y="4023360"/>
+            <a:ext cx="2526030" cy="1060704"/>
+          </a:xfrm>
+          <a:prstGeom prst="rect">
+            <a:avLst/>
+          </a:prstGeom>
+          <a:noFill/>
+        </p:spPr>
+        <p:txBody>
+          <a:bodyPr wrap="square" anchor="t" lIns="45720" rIns="45720" tIns="27432" bIns="27432">
+            <a:normAutofit/>
+          </a:bodyPr>
+          <a:lstStyle/>
+          <a:p>
+            <a:pPr algn="l"/>
+            <a:r>
+              <a:rPr sz="1100" b="1">
+                <a:solidFill>
+                  <a:srgbClr val="157355"/>
+                </a:solidFill>
+                <a:latin typeface="Bricolage Grotesque"/>
+              </a:rPr>
+              <a:t>marco</a:t>
+            </a:r>
+          </a:p>
+          <a:p>
+            <a:pPr algn="l"/>
+            <a:r>
+              <a:rPr sz="1000">
+                <a:solidFill>
+                  <a:srgbClr val="20242E"/>
+                </a:solidFill>
+                <a:latin typeface="Inter"/>
+              </a:rPr>
+              <a:t>El … está entre … y …</a:t>
+            </a:r>
+          </a:p>
+        </p:txBody>
+      </p:sp>
+      <p:sp>
+        <p:nvSpPr>
+          <p:cNvPr id="27" name="Tarjeta 8"/>
+          <p:cNvSpPr/>
+          <p:nvPr/>
+        </p:nvSpPr>
+        <p:spPr>
+          <a:xfrm>
+            <a:off x="457200" y="5266944"/>
+            <a:ext cx="2708910" cy="1170432"/>
+          </a:xfrm>
+          <a:prstGeom prst="roundRect">
+            <a:avLst>
+              <a:gd name="adj" fmla="val 6000"/>
+            </a:avLst>
+          </a:prstGeom>
+          <a:solidFill>
+            <a:srgbClr val="FFFFFF"/>
+          </a:solidFill>
+          <a:ln w="12700">
+            <a:solidFill>
+              <a:srgbClr val="E4E3DE"/>
+            </a:solidFill>
+          </a:ln>
+          <a:effectLst/>
+        </p:spPr>
+        <p:style>
+          <a:lnRef idx="1">
+            <a:schemeClr val="accent1"/>
+          </a:lnRef>
+          <a:fillRef idx="3">
+            <a:schemeClr val="accent1"/>
+          </a:fillRef>
+          <a:effectRef idx="2">
+            <a:schemeClr val="accent1"/>
+          </a:effectRef>
+          <a:fontRef idx="minor">
+            <a:schemeClr val="lt1"/>
+          </a:fontRef>
+        </p:style>
+        <p:txBody>
+          <a:bodyPr rtlCol="0" anchor="ctr"/>
+          <a:lstStyle/>
+          <a:p/>
+        </p:txBody>
+      </p:sp>
+      <p:sp>
+        <p:nvSpPr>
+          <p:cNvPr id="28" name="TarjetaTxt 8"/>
+          <p:cNvSpPr txBox="1"/>
+          <p:nvPr/>
+        </p:nvSpPr>
+        <p:spPr>
+          <a:xfrm>
+            <a:off x="548640" y="5321808"/>
+            <a:ext cx="2526030" cy="1060704"/>
+          </a:xfrm>
+          <a:prstGeom prst="rect">
+            <a:avLst/>
+          </a:prstGeom>
+          <a:noFill/>
+        </p:spPr>
+        <p:txBody>
+          <a:bodyPr wrap="square" anchor="t" lIns="45720" rIns="45720" tIns="27432" bIns="27432">
+            <a:normAutofit/>
+          </a:bodyPr>
+          <a:lstStyle/>
+          <a:p>
+            <a:pPr algn="l"/>
+            <a:r>
+              <a:rPr sz="1100" b="1">
+                <a:solidFill>
+                  <a:srgbClr val="157355"/>
+                </a:solidFill>
+                <a:latin typeface="Bricolage Grotesque"/>
+              </a:rPr>
+              <a:t>El dilema</a:t>
+            </a:r>
+          </a:p>
+          <a:p>
+            <a:pPr algn="l"/>
+            <a:r>
+              <a:rPr sz="1000">
+                <a:solidFill>
+                  <a:srgbClr val="20242E"/>
+                </a:solidFill>
+                <a:latin typeface="Inter"/>
+              </a:rPr>
+              <a:t>Sin viviendas no vive nadie en el barrio.</a:t>
+            </a:r>
+          </a:p>
+        </p:txBody>
+      </p:sp>
+      <p:sp>
+        <p:nvSpPr>
+          <p:cNvPr id="29" name="Tarjeta 9"/>
+          <p:cNvSpPr/>
+          <p:nvPr/>
+        </p:nvSpPr>
+        <p:spPr>
+          <a:xfrm>
+            <a:off x="3312414" y="5266944"/>
+            <a:ext cx="2708910" cy="1170432"/>
+          </a:xfrm>
+          <a:prstGeom prst="roundRect">
+            <a:avLst>
+              <a:gd name="adj" fmla="val 6000"/>
+            </a:avLst>
+          </a:prstGeom>
+          <a:solidFill>
+            <a:srgbClr val="FFFFFF"/>
+          </a:solidFill>
+          <a:ln w="12700">
+            <a:solidFill>
+              <a:srgbClr val="E4E3DE"/>
+            </a:solidFill>
+          </a:ln>
+          <a:effectLst/>
+        </p:spPr>
+        <p:style>
+          <a:lnRef idx="1">
+            <a:schemeClr val="accent1"/>
+          </a:lnRef>
+          <a:fillRef idx="3">
+            <a:schemeClr val="accent1"/>
+          </a:fillRef>
+          <a:effectRef idx="2">
+            <a:schemeClr val="accent1"/>
+          </a:effectRef>
+          <a:fontRef idx="minor">
+            <a:schemeClr val="lt1"/>
+          </a:fontRef>
+        </p:style>
+        <p:txBody>
+          <a:bodyPr rtlCol="0" anchor="ctr"/>
+          <a:lstStyle/>
+          <a:p/>
+        </p:txBody>
+      </p:sp>
+      <p:sp>
+        <p:nvSpPr>
+          <p:cNvPr id="30" name="TarjetaTxt 9"/>
+          <p:cNvSpPr txBox="1"/>
+          <p:nvPr/>
+        </p:nvSpPr>
+        <p:spPr>
+          <a:xfrm>
+            <a:off x="3403854" y="5321808"/>
+            <a:ext cx="2526030" cy="1060704"/>
+          </a:xfrm>
+          <a:prstGeom prst="rect">
+            <a:avLst/>
+          </a:prstGeom>
+          <a:noFill/>
+        </p:spPr>
+        <p:txBody>
+          <a:bodyPr wrap="square" anchor="t" lIns="45720" rIns="45720" tIns="27432" bIns="27432">
+            <a:normAutofit/>
+          </a:bodyPr>
+          <a:lstStyle/>
+          <a:p>
+            <a:pPr algn="l"/>
+            <a:r>
+              <a:rPr sz="1100" b="1">
+                <a:solidFill>
+                  <a:srgbClr val="157355"/>
+                </a:solidFill>
+                <a:latin typeface="Bricolage Grotesque"/>
+              </a:rPr>
+              <a:t>El dilema</a:t>
+            </a:r>
+          </a:p>
+          <a:p>
+            <a:pPr algn="l"/>
+            <a:r>
+              <a:rPr sz="1000">
+                <a:solidFill>
+                  <a:srgbClr val="20242E"/>
+                </a:solidFill>
+                <a:latin typeface="Inter"/>
+              </a:rPr>
+              <a:t>Sin parking los coches ocupan la plaza.</a:t>
+            </a:r>
+          </a:p>
+        </p:txBody>
+      </p:sp>
+      <p:sp>
+        <p:nvSpPr>
+          <p:cNvPr id="31" name="Tarjeta 10"/>
+          <p:cNvSpPr/>
+          <p:nvPr/>
+        </p:nvSpPr>
+        <p:spPr>
+          <a:xfrm>
+            <a:off x="6167628" y="5266944"/>
+            <a:ext cx="2708910" cy="1170432"/>
+          </a:xfrm>
+          <a:prstGeom prst="roundRect">
+            <a:avLst>
+              <a:gd name="adj" fmla="val 6000"/>
+            </a:avLst>
+          </a:prstGeom>
+          <a:solidFill>
+            <a:srgbClr val="FFFFFF"/>
+          </a:solidFill>
+          <a:ln w="12700">
+            <a:solidFill>
+              <a:srgbClr val="E4E3DE"/>
+            </a:solidFill>
+          </a:ln>
+          <a:effectLst/>
+        </p:spPr>
+        <p:style>
+          <a:lnRef idx="1">
+            <a:schemeClr val="accent1"/>
+          </a:lnRef>
+          <a:fillRef idx="3">
+            <a:schemeClr val="accent1"/>
+          </a:fillRef>
+          <a:effectRef idx="2">
+            <a:schemeClr val="accent1"/>
+          </a:effectRef>
+          <a:fontRef idx="minor">
+            <a:schemeClr val="lt1"/>
+          </a:fontRef>
+        </p:style>
+        <p:txBody>
+          <a:bodyPr rtlCol="0" anchor="ctr"/>
+          <a:lstStyle/>
+          <a:p/>
+        </p:txBody>
+      </p:sp>
+      <p:sp>
+        <p:nvSpPr>
+          <p:cNvPr id="32" name="TarjetaTxt 10"/>
+          <p:cNvSpPr txBox="1"/>
+          <p:nvPr/>
+        </p:nvSpPr>
+        <p:spPr>
+          <a:xfrm>
+            <a:off x="6259068" y="5321808"/>
+            <a:ext cx="2526030" cy="1060704"/>
+          </a:xfrm>
+          <a:prstGeom prst="rect">
+            <a:avLst/>
+          </a:prstGeom>
+          <a:noFill/>
+        </p:spPr>
+        <p:txBody>
+          <a:bodyPr wrap="square" anchor="t" lIns="45720" rIns="45720" tIns="27432" bIns="27432">
+            <a:normAutofit/>
+          </a:bodyPr>
+          <a:lstStyle/>
+          <a:p>
+            <a:pPr algn="l"/>
+            <a:r>
+              <a:rPr sz="1100" b="1">
+                <a:solidFill>
+                  <a:srgbClr val="157355"/>
+                </a:solidFill>
+                <a:latin typeface="Bricolage Grotesque"/>
+              </a:rPr>
+              <a:t>El dilema</a:t>
+            </a:r>
+          </a:p>
+          <a:p>
+            <a:pPr algn="l"/>
+            <a:r>
+              <a:rPr sz="1000">
+                <a:solidFill>
+                  <a:srgbClr val="20242E"/>
+                </a:solidFill>
+                <a:latin typeface="Inter"/>
+              </a:rPr>
+              <a:t>La escuela y el centro de salud juntos cuestan ocho puntos: casi todo.</a:t>
+            </a:r>
+          </a:p>
+        </p:txBody>
+      </p:sp>
+    </p:spTree>
+  </p:cSld>
+  <p:clrMapOvr>
+    <a:masterClrMapping/>
+  </p:clrMapOvr>
+</p:sld>
+</file>
+
+<file path=ppt/slides/slide23.xml><?xml version="1.0" encoding="utf-8"?>
+<p:sld xmlns:a="http://schemas.openxmlformats.org/drawingml/2006/main" xmlns:p="http://schemas.openxmlformats.org/presentationml/2006/main" xmlns:r="http://schemas.openxmlformats.org/officeDocument/2006/relationships">
+  <p:cSld>
+    <p:spTree>
+      <p:nvGrpSpPr>
+        <p:cNvPr id="1" name=""/>
+        <p:cNvGrpSpPr/>
+        <p:nvPr/>
+      </p:nvGrpSpPr>
+      <p:grpSpPr/>
+      <p:sp>
+        <p:nvSpPr>
+          <p:cNvPr id="2" name="Fondo"/>
+          <p:cNvSpPr/>
+          <p:nvPr/>
+        </p:nvSpPr>
+        <p:spPr>
+          <a:xfrm>
+            <a:off x="0" y="0"/>
+            <a:ext cx="12191695" cy="6858000"/>
+          </a:xfrm>
+          <a:prstGeom prst="rect">
+            <a:avLst/>
+          </a:prstGeom>
+          <a:solidFill>
+            <a:srgbClr val="FCFBF8"/>
+          </a:solidFill>
+          <a:ln>
+            <a:noFill/>
+          </a:ln>
+          <a:effectLst/>
+        </p:spPr>
+        <p:style>
+          <a:lnRef idx="1">
+            <a:schemeClr val="accent1"/>
+          </a:lnRef>
+          <a:fillRef idx="3">
+            <a:schemeClr val="accent1"/>
+          </a:fillRef>
+          <a:effectRef idx="2">
+            <a:schemeClr val="accent1"/>
+          </a:effectRef>
+          <a:fontRef idx="minor">
+            <a:schemeClr val="lt1"/>
+          </a:fontRef>
+        </p:style>
+        <p:txBody>
+          <a:bodyPr rtlCol="0" anchor="ctr"/>
+          <a:lstStyle/>
+          <a:p/>
+        </p:txBody>
+      </p:sp>
+      <p:sp>
+        <p:nvSpPr>
+          <p:cNvPr id="3" name="Cabecera"/>
+          <p:cNvSpPr/>
+          <p:nvPr/>
+        </p:nvSpPr>
+        <p:spPr>
+          <a:xfrm>
+            <a:off x="0" y="0"/>
+            <a:ext cx="12191695" cy="1078992"/>
+          </a:xfrm>
+          <a:prstGeom prst="rect">
+            <a:avLst/>
+          </a:prstGeom>
+          <a:solidFill>
+            <a:srgbClr val="1E9E74"/>
+          </a:solidFill>
+          <a:ln>
+            <a:noFill/>
+          </a:ln>
+          <a:effectLst/>
+        </p:spPr>
+        <p:style>
+          <a:lnRef idx="1">
+            <a:schemeClr val="accent1"/>
+          </a:lnRef>
+          <a:fillRef idx="3">
+            <a:schemeClr val="accent1"/>
+          </a:fillRef>
+          <a:effectRef idx="2">
+            <a:schemeClr val="accent1"/>
+          </a:effectRef>
+          <a:fontRef idx="minor">
+            <a:schemeClr val="lt1"/>
+          </a:fontRef>
+        </p:style>
+        <p:txBody>
+          <a:bodyPr rtlCol="0" anchor="ctr"/>
+          <a:lstStyle/>
+          <a:p/>
+        </p:txBody>
+      </p:sp>
+      <p:sp>
+        <p:nvSpPr>
+          <p:cNvPr id="4" name="Chip"/>
+          <p:cNvSpPr/>
+          <p:nvPr/>
+        </p:nvSpPr>
+        <p:spPr>
+          <a:xfrm>
+            <a:off x="457200" y="182880"/>
+            <a:ext cx="3017520" cy="292608"/>
+          </a:xfrm>
+          <a:prstGeom prst="roundRect">
+            <a:avLst>
+              <a:gd name="adj" fmla="val 50000"/>
+            </a:avLst>
+          </a:prstGeom>
+          <a:solidFill>
+            <a:srgbClr val="FFFFFF"/>
+          </a:solidFill>
+          <a:ln>
+            <a:noFill/>
+          </a:ln>
+          <a:effectLst/>
+        </p:spPr>
+        <p:style>
+          <a:lnRef idx="1">
+            <a:schemeClr val="accent1"/>
+          </a:lnRef>
+          <a:fillRef idx="3">
+            <a:schemeClr val="accent1"/>
+          </a:fillRef>
+          <a:effectRef idx="2">
+            <a:schemeClr val="accent1"/>
+          </a:effectRef>
+          <a:fontRef idx="minor">
+            <a:schemeClr val="lt1"/>
+          </a:fontRef>
+        </p:style>
+        <p:txBody>
+          <a:bodyPr rtlCol="0" anchor="ctr"/>
+          <a:lstStyle/>
+          <a:p/>
+        </p:txBody>
+      </p:sp>
+      <p:sp>
+        <p:nvSpPr>
+          <p:cNvPr id="5" name="ChipTxt"/>
+          <p:cNvSpPr txBox="1"/>
+          <p:nvPr/>
+        </p:nvSpPr>
+        <p:spPr>
+          <a:xfrm>
+            <a:off x="457200" y="173736"/>
+            <a:ext cx="3017520" cy="310896"/>
+          </a:xfrm>
+          <a:prstGeom prst="rect">
+            <a:avLst/>
+          </a:prstGeom>
+          <a:noFill/>
+        </p:spPr>
+        <p:txBody>
+          <a:bodyPr wrap="square" anchor="ctr" lIns="45720" rIns="45720" tIns="27432" bIns="27432">
+            <a:normAutofit/>
+          </a:bodyPr>
+          <a:lstStyle/>
+          <a:p>
+            <a:pPr algn="ctr"/>
+            <a:r>
+              <a:rPr sz="950" b="1">
+                <a:solidFill>
+                  <a:srgbClr val="157355"/>
+                </a:solidFill>
+                <a:latin typeface="Inter"/>
+              </a:rPr>
+              <a:t>RETO 7 · CREATIEVE BEPERKING</a:t>
+            </a:r>
+          </a:p>
+        </p:txBody>
+      </p:sp>
+      <p:sp>
+        <p:nvSpPr>
+          <p:cNvPr id="6" name="Titulo"/>
+          <p:cNvSpPr txBox="1"/>
+          <p:nvPr/>
+        </p:nvSpPr>
+        <p:spPr>
+          <a:xfrm>
+            <a:off x="457200" y="502920"/>
+            <a:ext cx="8412480" cy="475488"/>
+          </a:xfrm>
+          <a:prstGeom prst="rect">
+            <a:avLst/>
+          </a:prstGeom>
+          <a:noFill/>
+        </p:spPr>
+        <p:txBody>
+          <a:bodyPr wrap="square" anchor="t" lIns="45720" rIns="45720" tIns="27432" bIns="27432">
+            <a:normAutofit/>
+          </a:bodyPr>
+          <a:lstStyle/>
+          <a:p>
+            <a:pPr algn="l"/>
+            <a:r>
+              <a:rPr sz="2700" b="1">
+                <a:solidFill>
+                  <a:srgbClr val="FFFFFF"/>
+                </a:solidFill>
+                <a:latin typeface="Bricolage Grotesque"/>
+              </a:rPr>
+              <a:t>La casa del futuro sin futuro</a:t>
+            </a:r>
+          </a:p>
+        </p:txBody>
+      </p:sp>
+      <p:sp>
+        <p:nvSpPr>
+          <p:cNvPr id="7" name="Badges"/>
+          <p:cNvSpPr txBox="1"/>
+          <p:nvPr/>
+        </p:nvSpPr>
+        <p:spPr>
+          <a:xfrm>
+            <a:off x="9052560" y="256032"/>
+            <a:ext cx="2651760" cy="640080"/>
+          </a:xfrm>
+          <a:prstGeom prst="rect">
+            <a:avLst/>
+          </a:prstGeom>
+          <a:noFill/>
+        </p:spPr>
+        <p:txBody>
+          <a:bodyPr wrap="square" anchor="t" lIns="45720" rIns="45720" tIns="27432" bIns="27432">
+            <a:normAutofit/>
+          </a:bodyPr>
+          <a:lstStyle/>
+          <a:p>
+            <a:pPr algn="r"/>
+            <a:r>
+              <a:rPr sz="1000">
+                <a:solidFill>
+                  <a:srgbClr val="E4F4EE"/>
+                </a:solidFill>
+                <a:latin typeface="Inter"/>
+              </a:rPr>
+              <a:t>👤 Solo</a:t>
+            </a:r>
+          </a:p>
+          <a:p>
+            <a:pPr algn="r"/>
+            <a:r>
+              <a:rPr sz="1000">
+                <a:solidFill>
+                  <a:srgbClr val="E4F4EE"/>
+                </a:solidFill>
+                <a:latin typeface="Inter"/>
+              </a:rPr>
+              <a:t>± 12 min · ★★☆</a:t>
+            </a:r>
+          </a:p>
+        </p:txBody>
+      </p:sp>
+      <p:sp>
+        <p:nvSpPr>
+          <p:cNvPr id="8" name="Gancho"/>
+          <p:cNvSpPr txBox="1"/>
+          <p:nvPr/>
+        </p:nvSpPr>
+        <p:spPr>
+          <a:xfrm>
+            <a:off x="457200" y="1225296"/>
+            <a:ext cx="11274552" cy="566928"/>
+          </a:xfrm>
+          <a:prstGeom prst="rect">
+            <a:avLst/>
+          </a:prstGeom>
+          <a:noFill/>
+        </p:spPr>
+        <p:txBody>
+          <a:bodyPr wrap="square" anchor="t" lIns="45720" rIns="45720" tIns="27432" bIns="27432">
+            <a:normAutofit/>
+          </a:bodyPr>
+          <a:lstStyle/>
+          <a:p>
+            <a:pPr algn="l"/>
+            <a:r>
+              <a:rPr sz="1600" b="1">
+                <a:solidFill>
+                  <a:srgbClr val="157355"/>
+                </a:solidFill>
+                <a:latin typeface="Bricolage Grotesque"/>
+              </a:rPr>
+              <a:t>Tu casa del año 2100. Y ni un solo verbo en futuro.</a:t>
+            </a:r>
+          </a:p>
+          <a:p>
+            <a:pPr algn="l"/>
+            <a:r>
+              <a:rPr sz="1100" i="1">
+                <a:solidFill>
+                  <a:srgbClr val="6A6E78"/>
+                </a:solidFill>
+                <a:latin typeface="Inter"/>
+              </a:rPr>
+              <a:t>Jouw huis van het jaar 2100. En geen enkel werkwoord in de toekomende tijd.</a:t>
+            </a:r>
+          </a:p>
+        </p:txBody>
+      </p:sp>
+      <p:sp>
+        <p:nvSpPr>
+          <p:cNvPr id="9" name="ReglaCaja"/>
+          <p:cNvSpPr/>
+          <p:nvPr/>
+        </p:nvSpPr>
+        <p:spPr>
+          <a:xfrm>
+            <a:off x="457200" y="1847088"/>
+            <a:ext cx="11274552" cy="658368"/>
+          </a:xfrm>
+          <a:prstGeom prst="roundRect">
+            <a:avLst>
+              <a:gd name="adj" fmla="val 5000"/>
+            </a:avLst>
+          </a:prstGeom>
+          <a:solidFill>
+            <a:srgbClr val="FBF3D6"/>
+          </a:solidFill>
+          <a:ln>
+            <a:noFill/>
+          </a:ln>
+          <a:effectLst/>
+        </p:spPr>
+        <p:style>
+          <a:lnRef idx="1">
+            <a:schemeClr val="accent1"/>
+          </a:lnRef>
+          <a:fillRef idx="3">
+            <a:schemeClr val="accent1"/>
+          </a:fillRef>
+          <a:effectRef idx="2">
+            <a:schemeClr val="accent1"/>
+          </a:effectRef>
+          <a:fontRef idx="minor">
+            <a:schemeClr val="lt1"/>
+          </a:fontRef>
+        </p:style>
+        <p:txBody>
+          <a:bodyPr rtlCol="0" anchor="ctr"/>
+          <a:lstStyle/>
+          <a:p/>
+        </p:txBody>
+      </p:sp>
+      <p:sp>
+        <p:nvSpPr>
+          <p:cNvPr id="10" name="ReglaTxt"/>
+          <p:cNvSpPr txBox="1"/>
+          <p:nvPr/>
+        </p:nvSpPr>
+        <p:spPr>
+          <a:xfrm>
+            <a:off x="603504" y="1883664"/>
+            <a:ext cx="10972800" cy="585216"/>
+          </a:xfrm>
+          <a:prstGeom prst="rect">
+            <a:avLst/>
+          </a:prstGeom>
+          <a:noFill/>
+        </p:spPr>
+        <p:txBody>
+          <a:bodyPr wrap="square" anchor="t" lIns="45720" rIns="45720" tIns="27432" bIns="27432">
+            <a:normAutofit/>
+          </a:bodyPr>
+          <a:lstStyle/>
+          <a:p>
+            <a:pPr algn="l"/>
+            <a:r>
+              <a:rPr sz="850" b="1">
+                <a:solidFill>
+                  <a:srgbClr val="B7860B"/>
+                </a:solidFill>
+                <a:latin typeface="Inter"/>
+              </a:rPr>
+              <a:t>LA REGLA DEL RETO</a:t>
+            </a:r>
+          </a:p>
+          <a:p>
+            <a:pPr algn="l"/>
+            <a:r>
+              <a:rPr sz="1100">
+                <a:solidFill>
+                  <a:srgbClr val="20242E"/>
+                </a:solidFill>
+                <a:latin typeface="Inter"/>
+              </a:rPr>
+              <a:t>Alles in de tegenwoordige tijd, alsof je er nu rondloopt. Geen «zal», geen «gaat zijn». Wél «hay», «está», «tiene» en «se puede».</a:t>
+            </a:r>
+          </a:p>
+        </p:txBody>
+      </p:sp>
+      <p:sp>
+        <p:nvSpPr>
+          <p:cNvPr id="11" name="Tarjeta 0"/>
+          <p:cNvSpPr/>
+          <p:nvPr/>
+        </p:nvSpPr>
+        <p:spPr>
+          <a:xfrm>
+            <a:off x="457200" y="2670048"/>
+            <a:ext cx="2708910" cy="898398"/>
+          </a:xfrm>
+          <a:prstGeom prst="roundRect">
+            <a:avLst>
+              <a:gd name="adj" fmla="val 6000"/>
+            </a:avLst>
+          </a:prstGeom>
+          <a:solidFill>
+            <a:srgbClr val="FFFFFF"/>
+          </a:solidFill>
+          <a:ln w="12700">
+            <a:solidFill>
+              <a:srgbClr val="E4E3DE"/>
+            </a:solidFill>
+          </a:ln>
+          <a:effectLst/>
+        </p:spPr>
+        <p:style>
+          <a:lnRef idx="1">
+            <a:schemeClr val="accent1"/>
+          </a:lnRef>
+          <a:fillRef idx="3">
+            <a:schemeClr val="accent1"/>
+          </a:fillRef>
+          <a:effectRef idx="2">
+            <a:schemeClr val="accent1"/>
+          </a:effectRef>
+          <a:fontRef idx="minor">
+            <a:schemeClr val="lt1"/>
+          </a:fontRef>
+        </p:style>
+        <p:txBody>
+          <a:bodyPr rtlCol="0" anchor="ctr"/>
+          <a:lstStyle/>
+          <a:p/>
+        </p:txBody>
+      </p:sp>
+      <p:sp>
+        <p:nvSpPr>
+          <p:cNvPr id="12" name="TarjetaTxt 0"/>
+          <p:cNvSpPr txBox="1"/>
+          <p:nvPr/>
+        </p:nvSpPr>
+        <p:spPr>
+          <a:xfrm>
+            <a:off x="548640" y="2724912"/>
+            <a:ext cx="2526030" cy="788670"/>
+          </a:xfrm>
+          <a:prstGeom prst="rect">
+            <a:avLst/>
+          </a:prstGeom>
+          <a:noFill/>
+        </p:spPr>
+        <p:txBody>
+          <a:bodyPr wrap="square" anchor="t" lIns="45720" rIns="45720" tIns="27432" bIns="27432">
+            <a:normAutofit/>
+          </a:bodyPr>
+          <a:lstStyle/>
+          <a:p>
+            <a:pPr algn="l"/>
+            <a:r>
+              <a:rPr sz="1100" b="1">
+                <a:solidFill>
+                  <a:srgbClr val="157355"/>
+                </a:solidFill>
+                <a:latin typeface="Bricolage Grotesque"/>
+              </a:rPr>
+              <a:t>Arranque</a:t>
+            </a:r>
+          </a:p>
+          <a:p>
+            <a:pPr algn="l"/>
+            <a:r>
+              <a:rPr sz="1000">
+                <a:solidFill>
+                  <a:srgbClr val="20242E"/>
+                </a:solidFill>
+                <a:latin typeface="Inter"/>
+              </a:rPr>
+              <a:t>En mi casa hay …</a:t>
+            </a:r>
+          </a:p>
+        </p:txBody>
+      </p:sp>
+      <p:sp>
+        <p:nvSpPr>
+          <p:cNvPr id="13" name="Tarjeta 1"/>
+          <p:cNvSpPr/>
+          <p:nvPr/>
+        </p:nvSpPr>
+        <p:spPr>
+          <a:xfrm>
+            <a:off x="3312414" y="2670048"/>
+            <a:ext cx="2708910" cy="898398"/>
+          </a:xfrm>
+          <a:prstGeom prst="roundRect">
+            <a:avLst>
+              <a:gd name="adj" fmla="val 6000"/>
+            </a:avLst>
+          </a:prstGeom>
+          <a:solidFill>
+            <a:srgbClr val="FFFFFF"/>
+          </a:solidFill>
+          <a:ln w="12700">
+            <a:solidFill>
+              <a:srgbClr val="E4E3DE"/>
+            </a:solidFill>
+          </a:ln>
+          <a:effectLst/>
+        </p:spPr>
+        <p:style>
+          <a:lnRef idx="1">
+            <a:schemeClr val="accent1"/>
+          </a:lnRef>
+          <a:fillRef idx="3">
+            <a:schemeClr val="accent1"/>
+          </a:fillRef>
+          <a:effectRef idx="2">
+            <a:schemeClr val="accent1"/>
+          </a:effectRef>
+          <a:fontRef idx="minor">
+            <a:schemeClr val="lt1"/>
+          </a:fontRef>
+        </p:style>
+        <p:txBody>
+          <a:bodyPr rtlCol="0" anchor="ctr"/>
+          <a:lstStyle/>
+          <a:p/>
+        </p:txBody>
+      </p:sp>
+      <p:sp>
+        <p:nvSpPr>
+          <p:cNvPr id="14" name="TarjetaTxt 1"/>
+          <p:cNvSpPr txBox="1"/>
+          <p:nvPr/>
+        </p:nvSpPr>
+        <p:spPr>
+          <a:xfrm>
+            <a:off x="3403854" y="2724912"/>
+            <a:ext cx="2526030" cy="788670"/>
+          </a:xfrm>
+          <a:prstGeom prst="rect">
+            <a:avLst/>
+          </a:prstGeom>
+          <a:noFill/>
+        </p:spPr>
+        <p:txBody>
+          <a:bodyPr wrap="square" anchor="t" lIns="45720" rIns="45720" tIns="27432" bIns="27432">
+            <a:normAutofit/>
+          </a:bodyPr>
+          <a:lstStyle/>
+          <a:p>
+            <a:pPr algn="l"/>
+            <a:r>
+              <a:rPr sz="1100" b="1">
+                <a:solidFill>
+                  <a:srgbClr val="157355"/>
+                </a:solidFill>
+                <a:latin typeface="Bricolage Grotesque"/>
+              </a:rPr>
+              <a:t>Arranque</a:t>
+            </a:r>
+          </a:p>
+          <a:p>
+            <a:pPr algn="l"/>
+            <a:r>
+              <a:rPr sz="1000">
+                <a:solidFill>
+                  <a:srgbClr val="20242E"/>
+                </a:solidFill>
+                <a:latin typeface="Inter"/>
+              </a:rPr>
+              <a:t>En el salón está …</a:t>
+            </a:r>
+          </a:p>
+        </p:txBody>
+      </p:sp>
+      <p:sp>
+        <p:nvSpPr>
+          <p:cNvPr id="15" name="Tarjeta 2"/>
+          <p:cNvSpPr/>
+          <p:nvPr/>
+        </p:nvSpPr>
+        <p:spPr>
+          <a:xfrm>
+            <a:off x="6167628" y="2670048"/>
+            <a:ext cx="2708910" cy="898398"/>
+          </a:xfrm>
+          <a:prstGeom prst="roundRect">
+            <a:avLst>
+              <a:gd name="adj" fmla="val 6000"/>
+            </a:avLst>
+          </a:prstGeom>
+          <a:solidFill>
+            <a:srgbClr val="FFFFFF"/>
+          </a:solidFill>
+          <a:ln w="12700">
+            <a:solidFill>
+              <a:srgbClr val="E4E3DE"/>
+            </a:solidFill>
+          </a:ln>
+          <a:effectLst/>
+        </p:spPr>
+        <p:style>
+          <a:lnRef idx="1">
+            <a:schemeClr val="accent1"/>
+          </a:lnRef>
+          <a:fillRef idx="3">
+            <a:schemeClr val="accent1"/>
+          </a:fillRef>
+          <a:effectRef idx="2">
+            <a:schemeClr val="accent1"/>
+          </a:effectRef>
+          <a:fontRef idx="minor">
+            <a:schemeClr val="lt1"/>
+          </a:fontRef>
+        </p:style>
+        <p:txBody>
+          <a:bodyPr rtlCol="0" anchor="ctr"/>
+          <a:lstStyle/>
+          <a:p/>
+        </p:txBody>
+      </p:sp>
+      <p:sp>
+        <p:nvSpPr>
+          <p:cNvPr id="16" name="TarjetaTxt 2"/>
+          <p:cNvSpPr txBox="1"/>
+          <p:nvPr/>
+        </p:nvSpPr>
+        <p:spPr>
+          <a:xfrm>
+            <a:off x="6259068" y="2724912"/>
+            <a:ext cx="2526030" cy="788670"/>
+          </a:xfrm>
+          <a:prstGeom prst="rect">
+            <a:avLst/>
+          </a:prstGeom>
+          <a:noFill/>
+        </p:spPr>
+        <p:txBody>
+          <a:bodyPr wrap="square" anchor="t" lIns="45720" rIns="45720" tIns="27432" bIns="27432">
+            <a:normAutofit/>
+          </a:bodyPr>
+          <a:lstStyle/>
+          <a:p>
+            <a:pPr algn="l"/>
+            <a:r>
+              <a:rPr sz="1100" b="1">
+                <a:solidFill>
+                  <a:srgbClr val="157355"/>
+                </a:solidFill>
+                <a:latin typeface="Bricolage Grotesque"/>
+              </a:rPr>
+              <a:t>Arranque</a:t>
+            </a:r>
+          </a:p>
+          <a:p>
+            <a:pPr algn="l"/>
+            <a:r>
+              <a:rPr sz="1000">
+                <a:solidFill>
+                  <a:srgbClr val="20242E"/>
+                </a:solidFill>
+                <a:latin typeface="Inter"/>
+              </a:rPr>
+              <a:t>Desde la ventana se ve …</a:t>
+            </a:r>
+          </a:p>
+        </p:txBody>
+      </p:sp>
+      <p:sp>
+        <p:nvSpPr>
+          <p:cNvPr id="17" name="Tarjeta 3"/>
+          <p:cNvSpPr/>
+          <p:nvPr/>
+        </p:nvSpPr>
+        <p:spPr>
+          <a:xfrm>
+            <a:off x="9022842" y="2670048"/>
+            <a:ext cx="2708910" cy="898398"/>
+          </a:xfrm>
+          <a:prstGeom prst="roundRect">
+            <a:avLst>
+              <a:gd name="adj" fmla="val 6000"/>
+            </a:avLst>
+          </a:prstGeom>
+          <a:solidFill>
+            <a:srgbClr val="FFFFFF"/>
+          </a:solidFill>
+          <a:ln w="12700">
+            <a:solidFill>
+              <a:srgbClr val="E4E3DE"/>
+            </a:solidFill>
+          </a:ln>
+          <a:effectLst/>
+        </p:spPr>
+        <p:style>
+          <a:lnRef idx="1">
+            <a:schemeClr val="accent1"/>
+          </a:lnRef>
+          <a:fillRef idx="3">
+            <a:schemeClr val="accent1"/>
+          </a:fillRef>
+          <a:effectRef idx="2">
+            <a:schemeClr val="accent1"/>
+          </a:effectRef>
+          <a:fontRef idx="minor">
+            <a:schemeClr val="lt1"/>
+          </a:fontRef>
+        </p:style>
+        <p:txBody>
+          <a:bodyPr rtlCol="0" anchor="ctr"/>
+          <a:lstStyle/>
+          <a:p/>
+        </p:txBody>
+      </p:sp>
+      <p:sp>
+        <p:nvSpPr>
+          <p:cNvPr id="18" name="TarjetaTxt 3"/>
+          <p:cNvSpPr txBox="1"/>
+          <p:nvPr/>
+        </p:nvSpPr>
+        <p:spPr>
+          <a:xfrm>
+            <a:off x="9114282" y="2724912"/>
+            <a:ext cx="2526030" cy="788670"/>
+          </a:xfrm>
+          <a:prstGeom prst="rect">
+            <a:avLst/>
+          </a:prstGeom>
+          <a:noFill/>
+        </p:spPr>
+        <p:txBody>
+          <a:bodyPr wrap="square" anchor="t" lIns="45720" rIns="45720" tIns="27432" bIns="27432">
+            <a:normAutofit/>
+          </a:bodyPr>
+          <a:lstStyle/>
+          <a:p>
+            <a:pPr algn="l"/>
+            <a:r>
+              <a:rPr sz="1100" b="1">
+                <a:solidFill>
+                  <a:srgbClr val="157355"/>
+                </a:solidFill>
+                <a:latin typeface="Bricolage Grotesque"/>
+              </a:rPr>
+              <a:t>Arranque</a:t>
+            </a:r>
+          </a:p>
+          <a:p>
+            <a:pPr algn="l"/>
+            <a:r>
+              <a:rPr sz="1000">
+                <a:solidFill>
+                  <a:srgbClr val="20242E"/>
+                </a:solidFill>
+                <a:latin typeface="Inter"/>
+              </a:rPr>
+              <a:t>Debajo de la casa hay …</a:t>
+            </a:r>
+          </a:p>
+        </p:txBody>
+      </p:sp>
+      <p:sp>
+        <p:nvSpPr>
+          <p:cNvPr id="19" name="Tarjeta 4"/>
+          <p:cNvSpPr/>
+          <p:nvPr/>
+        </p:nvSpPr>
+        <p:spPr>
+          <a:xfrm>
+            <a:off x="457200" y="3696462"/>
+            <a:ext cx="2708910" cy="898398"/>
+          </a:xfrm>
+          <a:prstGeom prst="roundRect">
+            <a:avLst>
+              <a:gd name="adj" fmla="val 6000"/>
+            </a:avLst>
+          </a:prstGeom>
+          <a:solidFill>
+            <a:srgbClr val="FFFFFF"/>
+          </a:solidFill>
+          <a:ln w="12700">
+            <a:solidFill>
+              <a:srgbClr val="E4E3DE"/>
+            </a:solidFill>
+          </a:ln>
+          <a:effectLst/>
+        </p:spPr>
+        <p:style>
+          <a:lnRef idx="1">
+            <a:schemeClr val="accent1"/>
+          </a:lnRef>
+          <a:fillRef idx="3">
+            <a:schemeClr val="accent1"/>
+          </a:fillRef>
+          <a:effectRef idx="2">
+            <a:schemeClr val="accent1"/>
+          </a:effectRef>
+          <a:fontRef idx="minor">
+            <a:schemeClr val="lt1"/>
+          </a:fontRef>
+        </p:style>
+        <p:txBody>
+          <a:bodyPr rtlCol="0" anchor="ctr"/>
+          <a:lstStyle/>
+          <a:p/>
+        </p:txBody>
+      </p:sp>
+      <p:sp>
+        <p:nvSpPr>
+          <p:cNvPr id="20" name="TarjetaTxt 4"/>
+          <p:cNvSpPr txBox="1"/>
+          <p:nvPr/>
+        </p:nvSpPr>
+        <p:spPr>
+          <a:xfrm>
+            <a:off x="548640" y="3751326"/>
+            <a:ext cx="2526030" cy="788670"/>
+          </a:xfrm>
+          <a:prstGeom prst="rect">
+            <a:avLst/>
+          </a:prstGeom>
+          <a:noFill/>
+        </p:spPr>
+        <p:txBody>
+          <a:bodyPr wrap="square" anchor="t" lIns="45720" rIns="45720" tIns="27432" bIns="27432">
+            <a:normAutofit/>
+          </a:bodyPr>
+          <a:lstStyle/>
+          <a:p>
+            <a:pPr algn="l"/>
+            <a:r>
+              <a:rPr sz="1100" b="1">
+                <a:solidFill>
+                  <a:srgbClr val="157355"/>
+                </a:solidFill>
+                <a:latin typeface="Bricolage Grotesque"/>
+              </a:rPr>
+              <a:t>Arranque</a:t>
+            </a:r>
+          </a:p>
+          <a:p>
+            <a:pPr algn="l"/>
+            <a:r>
+              <a:rPr sz="1000">
+                <a:solidFill>
+                  <a:srgbClr val="20242E"/>
+                </a:solidFill>
+                <a:latin typeface="Inter"/>
+              </a:rPr>
+              <a:t>Lo mejor es que …</a:t>
+            </a:r>
+          </a:p>
+        </p:txBody>
+      </p:sp>
+      <p:sp>
+        <p:nvSpPr>
+          <p:cNvPr id="21" name="Tarjeta 5"/>
+          <p:cNvSpPr/>
+          <p:nvPr/>
+        </p:nvSpPr>
+        <p:spPr>
+          <a:xfrm>
+            <a:off x="3312414" y="3696462"/>
+            <a:ext cx="2708910" cy="898398"/>
+          </a:xfrm>
+          <a:prstGeom prst="roundRect">
+            <a:avLst>
+              <a:gd name="adj" fmla="val 6000"/>
+            </a:avLst>
+          </a:prstGeom>
+          <a:solidFill>
+            <a:srgbClr val="FFFFFF"/>
+          </a:solidFill>
+          <a:ln w="12700">
+            <a:solidFill>
+              <a:srgbClr val="E4E3DE"/>
+            </a:solidFill>
+          </a:ln>
+          <a:effectLst/>
+        </p:spPr>
+        <p:style>
+          <a:lnRef idx="1">
+            <a:schemeClr val="accent1"/>
+          </a:lnRef>
+          <a:fillRef idx="3">
+            <a:schemeClr val="accent1"/>
+          </a:fillRef>
+          <a:effectRef idx="2">
+            <a:schemeClr val="accent1"/>
+          </a:effectRef>
+          <a:fontRef idx="minor">
+            <a:schemeClr val="lt1"/>
+          </a:fontRef>
+        </p:style>
+        <p:txBody>
+          <a:bodyPr rtlCol="0" anchor="ctr"/>
+          <a:lstStyle/>
+          <a:p/>
+        </p:txBody>
+      </p:sp>
+      <p:sp>
+        <p:nvSpPr>
+          <p:cNvPr id="22" name="TarjetaTxt 5"/>
+          <p:cNvSpPr txBox="1"/>
+          <p:nvPr/>
+        </p:nvSpPr>
+        <p:spPr>
+          <a:xfrm>
+            <a:off x="3403854" y="3751326"/>
+            <a:ext cx="2526030" cy="788670"/>
+          </a:xfrm>
+          <a:prstGeom prst="rect">
+            <a:avLst/>
+          </a:prstGeom>
+          <a:noFill/>
+        </p:spPr>
+        <p:txBody>
+          <a:bodyPr wrap="square" anchor="t" lIns="45720" rIns="45720" tIns="27432" bIns="27432">
+            <a:normAutofit/>
+          </a:bodyPr>
+          <a:lstStyle/>
+          <a:p>
+            <a:pPr algn="l"/>
+            <a:r>
+              <a:rPr sz="1100" b="1">
+                <a:solidFill>
+                  <a:srgbClr val="157355"/>
+                </a:solidFill>
+                <a:latin typeface="Bricolage Grotesque"/>
+              </a:rPr>
+              <a:t>ejemplo</a:t>
+            </a:r>
+          </a:p>
+          <a:p>
+            <a:pPr algn="l"/>
+            <a:r>
+              <a:rPr sz="1000">
+                <a:solidFill>
+                  <a:srgbClr val="20242E"/>
+                </a:solidFill>
+                <a:latin typeface="Inter"/>
+              </a:rPr>
+              <a:t>una cocina que cocina sola</a:t>
+            </a:r>
+          </a:p>
+        </p:txBody>
+      </p:sp>
+      <p:sp>
+        <p:nvSpPr>
+          <p:cNvPr id="23" name="Tarjeta 6"/>
+          <p:cNvSpPr/>
+          <p:nvPr/>
+        </p:nvSpPr>
+        <p:spPr>
+          <a:xfrm>
+            <a:off x="6167628" y="3696462"/>
+            <a:ext cx="2708910" cy="898398"/>
+          </a:xfrm>
+          <a:prstGeom prst="roundRect">
+            <a:avLst>
+              <a:gd name="adj" fmla="val 6000"/>
+            </a:avLst>
+          </a:prstGeom>
+          <a:solidFill>
+            <a:srgbClr val="FFFFFF"/>
+          </a:solidFill>
+          <a:ln w="12700">
+            <a:solidFill>
+              <a:srgbClr val="E4E3DE"/>
+            </a:solidFill>
+          </a:ln>
+          <a:effectLst/>
+        </p:spPr>
+        <p:style>
+          <a:lnRef idx="1">
+            <a:schemeClr val="accent1"/>
+          </a:lnRef>
+          <a:fillRef idx="3">
+            <a:schemeClr val="accent1"/>
+          </a:fillRef>
+          <a:effectRef idx="2">
+            <a:schemeClr val="accent1"/>
+          </a:effectRef>
+          <a:fontRef idx="minor">
+            <a:schemeClr val="lt1"/>
+          </a:fontRef>
+        </p:style>
+        <p:txBody>
+          <a:bodyPr rtlCol="0" anchor="ctr"/>
+          <a:lstStyle/>
+          <a:p/>
+        </p:txBody>
+      </p:sp>
+      <p:sp>
+        <p:nvSpPr>
+          <p:cNvPr id="24" name="TarjetaTxt 6"/>
+          <p:cNvSpPr txBox="1"/>
+          <p:nvPr/>
+        </p:nvSpPr>
+        <p:spPr>
+          <a:xfrm>
+            <a:off x="6259068" y="3751326"/>
+            <a:ext cx="2526030" cy="788670"/>
+          </a:xfrm>
+          <a:prstGeom prst="rect">
+            <a:avLst/>
+          </a:prstGeom>
+          <a:noFill/>
+        </p:spPr>
+        <p:txBody>
+          <a:bodyPr wrap="square" anchor="t" lIns="45720" rIns="45720" tIns="27432" bIns="27432">
+            <a:normAutofit/>
+          </a:bodyPr>
+          <a:lstStyle/>
+          <a:p>
+            <a:pPr algn="l"/>
+            <a:r>
+              <a:rPr sz="1100" b="1">
+                <a:solidFill>
+                  <a:srgbClr val="157355"/>
+                </a:solidFill>
+                <a:latin typeface="Bricolage Grotesque"/>
+              </a:rPr>
+              <a:t>ejemplo</a:t>
+            </a:r>
+          </a:p>
+          <a:p>
+            <a:pPr algn="l"/>
+            <a:r>
+              <a:rPr sz="1000">
+                <a:solidFill>
+                  <a:srgbClr val="20242E"/>
+                </a:solidFill>
+                <a:latin typeface="Inter"/>
+              </a:rPr>
+              <a:t>un jardín en el techo</a:t>
+            </a:r>
+          </a:p>
+        </p:txBody>
+      </p:sp>
+      <p:sp>
+        <p:nvSpPr>
+          <p:cNvPr id="25" name="Tarjeta 7"/>
+          <p:cNvSpPr/>
+          <p:nvPr/>
+        </p:nvSpPr>
+        <p:spPr>
+          <a:xfrm>
+            <a:off x="9022842" y="3696462"/>
+            <a:ext cx="2708910" cy="898398"/>
+          </a:xfrm>
+          <a:prstGeom prst="roundRect">
+            <a:avLst>
+              <a:gd name="adj" fmla="val 6000"/>
+            </a:avLst>
+          </a:prstGeom>
+          <a:solidFill>
+            <a:srgbClr val="FFFFFF"/>
+          </a:solidFill>
+          <a:ln w="12700">
+            <a:solidFill>
+              <a:srgbClr val="E4E3DE"/>
+            </a:solidFill>
+          </a:ln>
+          <a:effectLst/>
+        </p:spPr>
+        <p:style>
+          <a:lnRef idx="1">
+            <a:schemeClr val="accent1"/>
+          </a:lnRef>
+          <a:fillRef idx="3">
+            <a:schemeClr val="accent1"/>
+          </a:fillRef>
+          <a:effectRef idx="2">
+            <a:schemeClr val="accent1"/>
+          </a:effectRef>
+          <a:fontRef idx="minor">
+            <a:schemeClr val="lt1"/>
+          </a:fontRef>
+        </p:style>
+        <p:txBody>
+          <a:bodyPr rtlCol="0" anchor="ctr"/>
+          <a:lstStyle/>
+          <a:p/>
+        </p:txBody>
+      </p:sp>
+      <p:sp>
+        <p:nvSpPr>
+          <p:cNvPr id="26" name="TarjetaTxt 7"/>
+          <p:cNvSpPr txBox="1"/>
+          <p:nvPr/>
+        </p:nvSpPr>
+        <p:spPr>
+          <a:xfrm>
+            <a:off x="9114282" y="3751326"/>
+            <a:ext cx="2526030" cy="788670"/>
+          </a:xfrm>
+          <a:prstGeom prst="rect">
+            <a:avLst/>
+          </a:prstGeom>
+          <a:noFill/>
+        </p:spPr>
+        <p:txBody>
+          <a:bodyPr wrap="square" anchor="t" lIns="45720" rIns="45720" tIns="27432" bIns="27432">
+            <a:normAutofit/>
+          </a:bodyPr>
+          <a:lstStyle/>
+          <a:p>
+            <a:pPr algn="l"/>
+            <a:r>
+              <a:rPr sz="1100" b="1">
+                <a:solidFill>
+                  <a:srgbClr val="157355"/>
+                </a:solidFill>
+                <a:latin typeface="Bricolage Grotesque"/>
+              </a:rPr>
+              <a:t>ejemplo</a:t>
+            </a:r>
+          </a:p>
+          <a:p>
+            <a:pPr algn="l"/>
+            <a:r>
+              <a:rPr sz="1000">
+                <a:solidFill>
+                  <a:srgbClr val="20242E"/>
+                </a:solidFill>
+                <a:latin typeface="Inter"/>
+              </a:rPr>
+              <a:t>una habitación que cambia de color</a:t>
+            </a:r>
+          </a:p>
+        </p:txBody>
+      </p:sp>
+      <p:sp>
+        <p:nvSpPr>
+          <p:cNvPr id="27" name="Tarjeta 8"/>
+          <p:cNvSpPr/>
+          <p:nvPr/>
+        </p:nvSpPr>
+        <p:spPr>
+          <a:xfrm>
+            <a:off x="457200" y="4722876"/>
+            <a:ext cx="2708910" cy="898398"/>
+          </a:xfrm>
+          <a:prstGeom prst="roundRect">
+            <a:avLst>
+              <a:gd name="adj" fmla="val 6000"/>
+            </a:avLst>
+          </a:prstGeom>
+          <a:solidFill>
+            <a:srgbClr val="FFFFFF"/>
+          </a:solidFill>
+          <a:ln w="12700">
+            <a:solidFill>
+              <a:srgbClr val="E4E3DE"/>
+            </a:solidFill>
+          </a:ln>
+          <a:effectLst/>
+        </p:spPr>
+        <p:style>
+          <a:lnRef idx="1">
+            <a:schemeClr val="accent1"/>
+          </a:lnRef>
+          <a:fillRef idx="3">
+            <a:schemeClr val="accent1"/>
+          </a:fillRef>
+          <a:effectRef idx="2">
+            <a:schemeClr val="accent1"/>
+          </a:effectRef>
+          <a:fontRef idx="minor">
+            <a:schemeClr val="lt1"/>
+          </a:fontRef>
+        </p:style>
+        <p:txBody>
+          <a:bodyPr rtlCol="0" anchor="ctr"/>
+          <a:lstStyle/>
+          <a:p/>
+        </p:txBody>
+      </p:sp>
+      <p:sp>
+        <p:nvSpPr>
+          <p:cNvPr id="28" name="TarjetaTxt 8"/>
+          <p:cNvSpPr txBox="1"/>
+          <p:nvPr/>
+        </p:nvSpPr>
+        <p:spPr>
+          <a:xfrm>
+            <a:off x="548640" y="4777740"/>
+            <a:ext cx="2526030" cy="788670"/>
+          </a:xfrm>
+          <a:prstGeom prst="rect">
+            <a:avLst/>
+          </a:prstGeom>
+          <a:noFill/>
+        </p:spPr>
+        <p:txBody>
+          <a:bodyPr wrap="square" anchor="t" lIns="45720" rIns="45720" tIns="27432" bIns="27432">
+            <a:normAutofit/>
+          </a:bodyPr>
+          <a:lstStyle/>
+          <a:p>
+            <a:pPr algn="l"/>
+            <a:r>
+              <a:rPr sz="1100" b="1">
+                <a:solidFill>
+                  <a:srgbClr val="157355"/>
+                </a:solidFill>
+                <a:latin typeface="Bricolage Grotesque"/>
+              </a:rPr>
+              <a:t>ejemplo</a:t>
+            </a:r>
+          </a:p>
+          <a:p>
+            <a:pPr algn="l"/>
+            <a:r>
+              <a:rPr sz="1000">
+                <a:solidFill>
+                  <a:srgbClr val="20242E"/>
+                </a:solidFill>
+                <a:latin typeface="Inter"/>
+              </a:rPr>
+              <a:t>un ascensor para la bici</a:t>
+            </a:r>
+          </a:p>
+        </p:txBody>
+      </p:sp>
+      <p:sp>
+        <p:nvSpPr>
+          <p:cNvPr id="29" name="Tarjeta 9"/>
+          <p:cNvSpPr/>
+          <p:nvPr/>
+        </p:nvSpPr>
+        <p:spPr>
+          <a:xfrm>
+            <a:off x="3312414" y="4722876"/>
+            <a:ext cx="2708910" cy="898398"/>
+          </a:xfrm>
+          <a:prstGeom prst="roundRect">
+            <a:avLst>
+              <a:gd name="adj" fmla="val 6000"/>
+            </a:avLst>
+          </a:prstGeom>
+          <a:solidFill>
+            <a:srgbClr val="FFFFFF"/>
+          </a:solidFill>
+          <a:ln w="12700">
+            <a:solidFill>
+              <a:srgbClr val="E4E3DE"/>
+            </a:solidFill>
+          </a:ln>
+          <a:effectLst/>
+        </p:spPr>
+        <p:style>
+          <a:lnRef idx="1">
+            <a:schemeClr val="accent1"/>
+          </a:lnRef>
+          <a:fillRef idx="3">
+            <a:schemeClr val="accent1"/>
+          </a:fillRef>
+          <a:effectRef idx="2">
+            <a:schemeClr val="accent1"/>
+          </a:effectRef>
+          <a:fontRef idx="minor">
+            <a:schemeClr val="lt1"/>
+          </a:fontRef>
+        </p:style>
+        <p:txBody>
+          <a:bodyPr rtlCol="0" anchor="ctr"/>
+          <a:lstStyle/>
+          <a:p/>
+        </p:txBody>
+      </p:sp>
+      <p:sp>
+        <p:nvSpPr>
+          <p:cNvPr id="30" name="TarjetaTxt 9"/>
+          <p:cNvSpPr txBox="1"/>
+          <p:nvPr/>
+        </p:nvSpPr>
+        <p:spPr>
+          <a:xfrm>
+            <a:off x="3403854" y="4777740"/>
+            <a:ext cx="2526030" cy="788670"/>
+          </a:xfrm>
+          <a:prstGeom prst="rect">
+            <a:avLst/>
+          </a:prstGeom>
+          <a:noFill/>
+        </p:spPr>
+        <p:txBody>
+          <a:bodyPr wrap="square" anchor="t" lIns="45720" rIns="45720" tIns="27432" bIns="27432">
+            <a:normAutofit/>
+          </a:bodyPr>
+          <a:lstStyle/>
+          <a:p>
+            <a:pPr algn="l"/>
+            <a:r>
+              <a:rPr sz="1100" b="1">
+                <a:solidFill>
+                  <a:srgbClr val="157355"/>
+                </a:solidFill>
+                <a:latin typeface="Bricolage Grotesque"/>
+              </a:rPr>
+              <a:t>PROHIBIDO</a:t>
+            </a:r>
+          </a:p>
+          <a:p>
+            <a:pPr algn="l"/>
+            <a:r>
+              <a:rPr sz="1000">
+                <a:solidFill>
+                  <a:srgbClr val="20242E"/>
+                </a:solidFill>
+                <a:latin typeface="Inter"/>
+              </a:rPr>
+              <a:t>será</a:t>
+            </a:r>
+          </a:p>
+        </p:txBody>
+      </p:sp>
+      <p:sp>
+        <p:nvSpPr>
+          <p:cNvPr id="31" name="Tarjeta 10"/>
+          <p:cNvSpPr/>
+          <p:nvPr/>
+        </p:nvSpPr>
+        <p:spPr>
+          <a:xfrm>
+            <a:off x="6167628" y="4722876"/>
+            <a:ext cx="2708910" cy="898398"/>
+          </a:xfrm>
+          <a:prstGeom prst="roundRect">
+            <a:avLst>
+              <a:gd name="adj" fmla="val 6000"/>
+            </a:avLst>
+          </a:prstGeom>
+          <a:solidFill>
+            <a:srgbClr val="FFFFFF"/>
+          </a:solidFill>
+          <a:ln w="12700">
+            <a:solidFill>
+              <a:srgbClr val="E4E3DE"/>
+            </a:solidFill>
+          </a:ln>
+          <a:effectLst/>
+        </p:spPr>
+        <p:style>
+          <a:lnRef idx="1">
+            <a:schemeClr val="accent1"/>
+          </a:lnRef>
+          <a:fillRef idx="3">
+            <a:schemeClr val="accent1"/>
+          </a:fillRef>
+          <a:effectRef idx="2">
+            <a:schemeClr val="accent1"/>
+          </a:effectRef>
+          <a:fontRef idx="minor">
+            <a:schemeClr val="lt1"/>
+          </a:fontRef>
+        </p:style>
+        <p:txBody>
+          <a:bodyPr rtlCol="0" anchor="ctr"/>
+          <a:lstStyle/>
+          <a:p/>
+        </p:txBody>
+      </p:sp>
+      <p:sp>
+        <p:nvSpPr>
+          <p:cNvPr id="32" name="TarjetaTxt 10"/>
+          <p:cNvSpPr txBox="1"/>
+          <p:nvPr/>
+        </p:nvSpPr>
+        <p:spPr>
+          <a:xfrm>
+            <a:off x="6259068" y="4777740"/>
+            <a:ext cx="2526030" cy="788670"/>
+          </a:xfrm>
+          <a:prstGeom prst="rect">
+            <a:avLst/>
+          </a:prstGeom>
+          <a:noFill/>
+        </p:spPr>
+        <p:txBody>
+          <a:bodyPr wrap="square" anchor="t" lIns="45720" rIns="45720" tIns="27432" bIns="27432">
+            <a:normAutofit/>
+          </a:bodyPr>
+          <a:lstStyle/>
+          <a:p>
+            <a:pPr algn="l"/>
+            <a:r>
+              <a:rPr sz="1100" b="1">
+                <a:solidFill>
+                  <a:srgbClr val="157355"/>
+                </a:solidFill>
+                <a:latin typeface="Bricolage Grotesque"/>
+              </a:rPr>
+              <a:t>PROHIBIDO</a:t>
+            </a:r>
+          </a:p>
+          <a:p>
+            <a:pPr algn="l"/>
+            <a:r>
+              <a:rPr sz="1000">
+                <a:solidFill>
+                  <a:srgbClr val="20242E"/>
+                </a:solidFill>
+                <a:latin typeface="Inter"/>
+              </a:rPr>
+              <a:t>habrá</a:t>
+            </a:r>
+          </a:p>
+        </p:txBody>
+      </p:sp>
+      <p:sp>
+        <p:nvSpPr>
+          <p:cNvPr id="33" name="Tarjeta 11"/>
+          <p:cNvSpPr/>
+          <p:nvPr/>
+        </p:nvSpPr>
+        <p:spPr>
+          <a:xfrm>
+            <a:off x="9022842" y="4722876"/>
+            <a:ext cx="2708910" cy="898398"/>
+          </a:xfrm>
+          <a:prstGeom prst="roundRect">
+            <a:avLst>
+              <a:gd name="adj" fmla="val 6000"/>
+            </a:avLst>
+          </a:prstGeom>
+          <a:solidFill>
+            <a:srgbClr val="FFFFFF"/>
+          </a:solidFill>
+          <a:ln w="12700">
+            <a:solidFill>
+              <a:srgbClr val="E4E3DE"/>
+            </a:solidFill>
+          </a:ln>
+          <a:effectLst/>
+        </p:spPr>
+        <p:style>
+          <a:lnRef idx="1">
+            <a:schemeClr val="accent1"/>
+          </a:lnRef>
+          <a:fillRef idx="3">
+            <a:schemeClr val="accent1"/>
+          </a:fillRef>
+          <a:effectRef idx="2">
+            <a:schemeClr val="accent1"/>
+          </a:effectRef>
+          <a:fontRef idx="minor">
+            <a:schemeClr val="lt1"/>
+          </a:fontRef>
+        </p:style>
+        <p:txBody>
+          <a:bodyPr rtlCol="0" anchor="ctr"/>
+          <a:lstStyle/>
+          <a:p/>
+        </p:txBody>
+      </p:sp>
+      <p:sp>
+        <p:nvSpPr>
+          <p:cNvPr id="34" name="TarjetaTxt 11"/>
+          <p:cNvSpPr txBox="1"/>
+          <p:nvPr/>
+        </p:nvSpPr>
+        <p:spPr>
+          <a:xfrm>
+            <a:off x="9114282" y="4777740"/>
+            <a:ext cx="2526030" cy="788670"/>
+          </a:xfrm>
+          <a:prstGeom prst="rect">
+            <a:avLst/>
+          </a:prstGeom>
+          <a:noFill/>
+        </p:spPr>
+        <p:txBody>
+          <a:bodyPr wrap="square" anchor="t" lIns="45720" rIns="45720" tIns="27432" bIns="27432">
+            <a:normAutofit/>
+          </a:bodyPr>
+          <a:lstStyle/>
+          <a:p>
+            <a:pPr algn="l"/>
+            <a:r>
+              <a:rPr sz="1100" b="1">
+                <a:solidFill>
+                  <a:srgbClr val="157355"/>
+                </a:solidFill>
+                <a:latin typeface="Bricolage Grotesque"/>
+              </a:rPr>
+              <a:t>PROHIBIDO</a:t>
+            </a:r>
+          </a:p>
+          <a:p>
+            <a:pPr algn="l"/>
+            <a:r>
+              <a:rPr sz="1000">
+                <a:solidFill>
+                  <a:srgbClr val="20242E"/>
+                </a:solidFill>
+                <a:latin typeface="Inter"/>
+              </a:rPr>
+              <a:t>tendré</a:t>
+            </a:r>
+          </a:p>
+        </p:txBody>
+      </p:sp>
+      <p:sp>
+        <p:nvSpPr>
+          <p:cNvPr id="35" name="Tarjeta 12"/>
+          <p:cNvSpPr/>
+          <p:nvPr/>
+        </p:nvSpPr>
+        <p:spPr>
+          <a:xfrm>
+            <a:off x="457200" y="5749290"/>
+            <a:ext cx="2708910" cy="898398"/>
+          </a:xfrm>
+          <a:prstGeom prst="roundRect">
+            <a:avLst>
+              <a:gd name="adj" fmla="val 6000"/>
+            </a:avLst>
+          </a:prstGeom>
+          <a:solidFill>
+            <a:srgbClr val="FFFFFF"/>
+          </a:solidFill>
+          <a:ln w="12700">
+            <a:solidFill>
+              <a:srgbClr val="E4E3DE"/>
+            </a:solidFill>
+          </a:ln>
+          <a:effectLst/>
+        </p:spPr>
+        <p:style>
+          <a:lnRef idx="1">
+            <a:schemeClr val="accent1"/>
+          </a:lnRef>
+          <a:fillRef idx="3">
+            <a:schemeClr val="accent1"/>
+          </a:fillRef>
+          <a:effectRef idx="2">
+            <a:schemeClr val="accent1"/>
+          </a:effectRef>
+          <a:fontRef idx="minor">
+            <a:schemeClr val="lt1"/>
+          </a:fontRef>
+        </p:style>
+        <p:txBody>
+          <a:bodyPr rtlCol="0" anchor="ctr"/>
+          <a:lstStyle/>
+          <a:p/>
+        </p:txBody>
+      </p:sp>
+      <p:sp>
+        <p:nvSpPr>
+          <p:cNvPr id="36" name="TarjetaTxt 12"/>
+          <p:cNvSpPr txBox="1"/>
+          <p:nvPr/>
+        </p:nvSpPr>
+        <p:spPr>
+          <a:xfrm>
+            <a:off x="548640" y="5804154"/>
+            <a:ext cx="2526030" cy="788670"/>
+          </a:xfrm>
+          <a:prstGeom prst="rect">
+            <a:avLst/>
+          </a:prstGeom>
+          <a:noFill/>
+        </p:spPr>
+        <p:txBody>
+          <a:bodyPr wrap="square" anchor="t" lIns="45720" rIns="45720" tIns="27432" bIns="27432">
+            <a:normAutofit/>
+          </a:bodyPr>
+          <a:lstStyle/>
+          <a:p>
+            <a:pPr algn="l"/>
+            <a:r>
+              <a:rPr sz="1100" b="1">
+                <a:solidFill>
+                  <a:srgbClr val="157355"/>
+                </a:solidFill>
+                <a:latin typeface="Bricolage Grotesque"/>
+              </a:rPr>
+              <a:t>PROHIBIDO</a:t>
+            </a:r>
+          </a:p>
+          <a:p>
+            <a:pPr algn="l"/>
+            <a:r>
+              <a:rPr sz="1000">
+                <a:solidFill>
+                  <a:srgbClr val="20242E"/>
+                </a:solidFill>
+                <a:latin typeface="Inter"/>
+              </a:rPr>
+              <a:t>voy a tener</a:t>
+            </a:r>
+          </a:p>
+        </p:txBody>
+      </p:sp>
+      <p:sp>
+        <p:nvSpPr>
+          <p:cNvPr id="37" name="Tarjeta 13"/>
+          <p:cNvSpPr/>
+          <p:nvPr/>
+        </p:nvSpPr>
+        <p:spPr>
+          <a:xfrm>
+            <a:off x="3312414" y="5749290"/>
+            <a:ext cx="2708910" cy="898398"/>
+          </a:xfrm>
+          <a:prstGeom prst="roundRect">
+            <a:avLst>
+              <a:gd name="adj" fmla="val 6000"/>
+            </a:avLst>
+          </a:prstGeom>
+          <a:solidFill>
+            <a:srgbClr val="FFFFFF"/>
+          </a:solidFill>
+          <a:ln w="12700">
+            <a:solidFill>
+              <a:srgbClr val="E4E3DE"/>
+            </a:solidFill>
+          </a:ln>
+          <a:effectLst/>
+        </p:spPr>
+        <p:style>
+          <a:lnRef idx="1">
+            <a:schemeClr val="accent1"/>
+          </a:lnRef>
+          <a:fillRef idx="3">
+            <a:schemeClr val="accent1"/>
+          </a:fillRef>
+          <a:effectRef idx="2">
+            <a:schemeClr val="accent1"/>
+          </a:effectRef>
+          <a:fontRef idx="minor">
+            <a:schemeClr val="lt1"/>
+          </a:fontRef>
+        </p:style>
+        <p:txBody>
+          <a:bodyPr rtlCol="0" anchor="ctr"/>
+          <a:lstStyle/>
+          <a:p/>
+        </p:txBody>
+      </p:sp>
+      <p:sp>
+        <p:nvSpPr>
+          <p:cNvPr id="38" name="TarjetaTxt 13"/>
+          <p:cNvSpPr txBox="1"/>
+          <p:nvPr/>
+        </p:nvSpPr>
+        <p:spPr>
+          <a:xfrm>
+            <a:off x="3403854" y="5804154"/>
+            <a:ext cx="2526030" cy="788670"/>
+          </a:xfrm>
+          <a:prstGeom prst="rect">
+            <a:avLst/>
+          </a:prstGeom>
+          <a:noFill/>
+        </p:spPr>
+        <p:txBody>
+          <a:bodyPr wrap="square" anchor="t" lIns="45720" rIns="45720" tIns="27432" bIns="27432">
+            <a:normAutofit/>
+          </a:bodyPr>
+          <a:lstStyle/>
+          <a:p>
+            <a:pPr algn="l"/>
+            <a:r>
+              <a:rPr sz="1100" b="1">
+                <a:solidFill>
+                  <a:srgbClr val="157355"/>
+                </a:solidFill>
+                <a:latin typeface="Bricolage Grotesque"/>
+              </a:rPr>
+              <a:t>PROHIBIDO</a:t>
+            </a:r>
+          </a:p>
+          <a:p>
+            <a:pPr algn="l"/>
+            <a:r>
+              <a:rPr sz="1000">
+                <a:solidFill>
+                  <a:srgbClr val="20242E"/>
+                </a:solidFill>
+                <a:latin typeface="Inter"/>
+              </a:rPr>
+              <a:t>estará</a:t>
+            </a:r>
+          </a:p>
+        </p:txBody>
+      </p:sp>
+    </p:spTree>
+  </p:cSld>
+  <p:clrMapOvr>
+    <a:masterClrMapping/>
+  </p:clrMapOvr>
+</p:sld>
+</file>
+
+<file path=ppt/slides/slide24.xml><?xml version="1.0" encoding="utf-8"?>
+<p:sld xmlns:a="http://schemas.openxmlformats.org/drawingml/2006/main" xmlns:p="http://schemas.openxmlformats.org/presentationml/2006/main" xmlns:r="http://schemas.openxmlformats.org/officeDocument/2006/relationships">
+  <p:cSld>
+    <p:spTree>
+      <p:nvGrpSpPr>
+        <p:cNvPr id="1" name=""/>
+        <p:cNvGrpSpPr/>
+        <p:nvPr/>
+      </p:nvGrpSpPr>
+      <p:grpSpPr/>
+      <p:sp>
+        <p:nvSpPr>
+          <p:cNvPr id="2" name="Fondo"/>
+          <p:cNvSpPr/>
+          <p:nvPr/>
+        </p:nvSpPr>
+        <p:spPr>
+          <a:xfrm>
+            <a:off x="0" y="0"/>
+            <a:ext cx="12191695" cy="6858000"/>
+          </a:xfrm>
+          <a:prstGeom prst="rect">
+            <a:avLst/>
+          </a:prstGeom>
+          <a:solidFill>
+            <a:srgbClr val="FCFBF8"/>
+          </a:solidFill>
+          <a:ln>
+            <a:noFill/>
+          </a:ln>
+          <a:effectLst/>
+        </p:spPr>
+        <p:style>
+          <a:lnRef idx="1">
+            <a:schemeClr val="accent1"/>
+          </a:lnRef>
+          <a:fillRef idx="3">
+            <a:schemeClr val="accent1"/>
+          </a:fillRef>
+          <a:effectRef idx="2">
+            <a:schemeClr val="accent1"/>
+          </a:effectRef>
+          <a:fontRef idx="minor">
+            <a:schemeClr val="lt1"/>
+          </a:fontRef>
+        </p:style>
+        <p:txBody>
+          <a:bodyPr rtlCol="0" anchor="ctr"/>
+          <a:lstStyle/>
+          <a:p/>
+        </p:txBody>
+      </p:sp>
+      <p:sp>
+        <p:nvSpPr>
+          <p:cNvPr id="3" name="Cabecera"/>
+          <p:cNvSpPr/>
+          <p:nvPr/>
+        </p:nvSpPr>
+        <p:spPr>
+          <a:xfrm>
+            <a:off x="0" y="0"/>
+            <a:ext cx="12191695" cy="1078992"/>
+          </a:xfrm>
+          <a:prstGeom prst="rect">
+            <a:avLst/>
+          </a:prstGeom>
+          <a:solidFill>
+            <a:srgbClr val="1E9E74"/>
+          </a:solidFill>
+          <a:ln>
+            <a:noFill/>
+          </a:ln>
+          <a:effectLst/>
+        </p:spPr>
+        <p:style>
+          <a:lnRef idx="1">
+            <a:schemeClr val="accent1"/>
+          </a:lnRef>
+          <a:fillRef idx="3">
+            <a:schemeClr val="accent1"/>
+          </a:fillRef>
+          <a:effectRef idx="2">
+            <a:schemeClr val="accent1"/>
+          </a:effectRef>
+          <a:fontRef idx="minor">
+            <a:schemeClr val="lt1"/>
+          </a:fontRef>
+        </p:style>
+        <p:txBody>
+          <a:bodyPr rtlCol="0" anchor="ctr"/>
+          <a:lstStyle/>
+          <a:p/>
+        </p:txBody>
+      </p:sp>
+      <p:sp>
+        <p:nvSpPr>
+          <p:cNvPr id="4" name="Chip"/>
+          <p:cNvSpPr/>
+          <p:nvPr/>
+        </p:nvSpPr>
+        <p:spPr>
+          <a:xfrm>
+            <a:off x="457200" y="182880"/>
+            <a:ext cx="3017520" cy="292608"/>
+          </a:xfrm>
+          <a:prstGeom prst="roundRect">
+            <a:avLst>
+              <a:gd name="adj" fmla="val 50000"/>
+            </a:avLst>
+          </a:prstGeom>
+          <a:solidFill>
+            <a:srgbClr val="FFFFFF"/>
+          </a:solidFill>
+          <a:ln>
+            <a:noFill/>
+          </a:ln>
+          <a:effectLst/>
+        </p:spPr>
+        <p:style>
+          <a:lnRef idx="1">
+            <a:schemeClr val="accent1"/>
+          </a:lnRef>
+          <a:fillRef idx="3">
+            <a:schemeClr val="accent1"/>
+          </a:fillRef>
+          <a:effectRef idx="2">
+            <a:schemeClr val="accent1"/>
+          </a:effectRef>
+          <a:fontRef idx="minor">
+            <a:schemeClr val="lt1"/>
+          </a:fontRef>
+        </p:style>
+        <p:txBody>
+          <a:bodyPr rtlCol="0" anchor="ctr"/>
+          <a:lstStyle/>
+          <a:p/>
+        </p:txBody>
+      </p:sp>
+      <p:sp>
+        <p:nvSpPr>
+          <p:cNvPr id="5" name="ChipTxt"/>
+          <p:cNvSpPr txBox="1"/>
+          <p:nvPr/>
+        </p:nvSpPr>
+        <p:spPr>
+          <a:xfrm>
+            <a:off x="457200" y="173736"/>
+            <a:ext cx="3017520" cy="310896"/>
+          </a:xfrm>
+          <a:prstGeom prst="rect">
+            <a:avLst/>
+          </a:prstGeom>
+          <a:noFill/>
+        </p:spPr>
+        <p:txBody>
+          <a:bodyPr wrap="square" anchor="ctr" lIns="45720" rIns="45720" tIns="27432" bIns="27432">
+            <a:normAutofit/>
+          </a:bodyPr>
+          <a:lstStyle/>
+          <a:p>
+            <a:pPr algn="ctr"/>
+            <a:r>
+              <a:rPr sz="950" b="1">
+                <a:solidFill>
+                  <a:srgbClr val="157355"/>
+                </a:solidFill>
+                <a:latin typeface="Inter"/>
+              </a:rPr>
+              <a:t>RETO 8 · SIMULATIE MET BEPERKING</a:t>
+            </a:r>
+          </a:p>
+        </p:txBody>
+      </p:sp>
+      <p:sp>
+        <p:nvSpPr>
+          <p:cNvPr id="6" name="Titulo"/>
+          <p:cNvSpPr txBox="1"/>
+          <p:nvPr/>
+        </p:nvSpPr>
+        <p:spPr>
+          <a:xfrm>
+            <a:off x="457200" y="502920"/>
+            <a:ext cx="8412480" cy="475488"/>
+          </a:xfrm>
+          <a:prstGeom prst="rect">
+            <a:avLst/>
+          </a:prstGeom>
+          <a:noFill/>
+        </p:spPr>
+        <p:txBody>
+          <a:bodyPr wrap="square" anchor="t" lIns="45720" rIns="45720" tIns="27432" bIns="27432">
+            <a:normAutofit/>
+          </a:bodyPr>
+          <a:lstStyle/>
+          <a:p>
+            <a:pPr algn="l"/>
+            <a:r>
+              <a:rPr sz="2700" b="1">
+                <a:solidFill>
+                  <a:srgbClr val="FFFFFF"/>
+                </a:solidFill>
+                <a:latin typeface="Bricolage Grotesque"/>
+              </a:rPr>
+              <a:t>El vecino ruidoso</a:t>
+            </a:r>
+          </a:p>
+        </p:txBody>
+      </p:sp>
+      <p:sp>
+        <p:nvSpPr>
+          <p:cNvPr id="7" name="Badges"/>
+          <p:cNvSpPr txBox="1"/>
+          <p:nvPr/>
+        </p:nvSpPr>
+        <p:spPr>
+          <a:xfrm>
+            <a:off x="9052560" y="256032"/>
+            <a:ext cx="2651760" cy="640080"/>
+          </a:xfrm>
+          <a:prstGeom prst="rect">
+            <a:avLst/>
+          </a:prstGeom>
+          <a:noFill/>
+        </p:spPr>
+        <p:txBody>
+          <a:bodyPr wrap="square" anchor="t" lIns="45720" rIns="45720" tIns="27432" bIns="27432">
+            <a:normAutofit/>
+          </a:bodyPr>
+          <a:lstStyle/>
+          <a:p>
+            <a:pPr algn="r"/>
+            <a:r>
+              <a:rPr sz="1000">
+                <a:solidFill>
+                  <a:srgbClr val="E4F4EE"/>
+                </a:solidFill>
+                <a:latin typeface="Inter"/>
+              </a:rPr>
+              <a:t>👥 En parejas</a:t>
+            </a:r>
+          </a:p>
+          <a:p>
+            <a:pPr algn="r"/>
+            <a:r>
+              <a:rPr sz="1000">
+                <a:solidFill>
+                  <a:srgbClr val="E4F4EE"/>
+                </a:solidFill>
+                <a:latin typeface="Inter"/>
+              </a:rPr>
+              <a:t>± 15 min · ★★★</a:t>
+            </a:r>
+          </a:p>
+        </p:txBody>
+      </p:sp>
+      <p:sp>
+        <p:nvSpPr>
+          <p:cNvPr id="8" name="Gancho"/>
+          <p:cNvSpPr txBox="1"/>
+          <p:nvPr/>
+        </p:nvSpPr>
+        <p:spPr>
+          <a:xfrm>
+            <a:off x="457200" y="1225296"/>
+            <a:ext cx="11274552" cy="566928"/>
+          </a:xfrm>
+          <a:prstGeom prst="rect">
+            <a:avLst/>
+          </a:prstGeom>
+          <a:noFill/>
+        </p:spPr>
+        <p:txBody>
+          <a:bodyPr wrap="square" anchor="t" lIns="45720" rIns="45720" tIns="27432" bIns="27432">
+            <a:normAutofit/>
+          </a:bodyPr>
+          <a:lstStyle/>
+          <a:p>
+            <a:pPr algn="l"/>
+            <a:r>
+              <a:rPr sz="1600" b="1">
+                <a:solidFill>
+                  <a:srgbClr val="157355"/>
+                </a:solidFill>
+                <a:latin typeface="Bricolage Grotesque"/>
+              </a:rPr>
+              <a:t>Una nota bajo la puerta. Y la respuesta, también por debajo.</a:t>
+            </a:r>
+          </a:p>
+          <a:p>
+            <a:pPr algn="l"/>
+            <a:r>
+              <a:rPr sz="1100" i="1">
+                <a:solidFill>
+                  <a:srgbClr val="6A6E78"/>
+                </a:solidFill>
+                <a:latin typeface="Inter"/>
+              </a:rPr>
+              <a:t>Een briefje onder de deur. En het antwoord, ook onder de deur.</a:t>
+            </a:r>
+          </a:p>
+        </p:txBody>
+      </p:sp>
+      <p:sp>
+        <p:nvSpPr>
+          <p:cNvPr id="9" name="ReglaCaja"/>
+          <p:cNvSpPr/>
+          <p:nvPr/>
+        </p:nvSpPr>
+        <p:spPr>
+          <a:xfrm>
+            <a:off x="457200" y="1847088"/>
+            <a:ext cx="11274552" cy="658368"/>
+          </a:xfrm>
+          <a:prstGeom prst="roundRect">
+            <a:avLst>
+              <a:gd name="adj" fmla="val 5000"/>
+            </a:avLst>
+          </a:prstGeom>
+          <a:solidFill>
+            <a:srgbClr val="FBF3D6"/>
+          </a:solidFill>
+          <a:ln>
+            <a:noFill/>
+          </a:ln>
+          <a:effectLst/>
+        </p:spPr>
+        <p:style>
+          <a:lnRef idx="1">
+            <a:schemeClr val="accent1"/>
+          </a:lnRef>
+          <a:fillRef idx="3">
+            <a:schemeClr val="accent1"/>
+          </a:fillRef>
+          <a:effectRef idx="2">
+            <a:schemeClr val="accent1"/>
+          </a:effectRef>
+          <a:fontRef idx="minor">
+            <a:schemeClr val="lt1"/>
+          </a:fontRef>
+        </p:style>
+        <p:txBody>
+          <a:bodyPr rtlCol="0" anchor="ctr"/>
+          <a:lstStyle/>
+          <a:p/>
+        </p:txBody>
+      </p:sp>
+      <p:sp>
+        <p:nvSpPr>
+          <p:cNvPr id="10" name="ReglaTxt"/>
+          <p:cNvSpPr txBox="1"/>
+          <p:nvPr/>
+        </p:nvSpPr>
+        <p:spPr>
+          <a:xfrm>
+            <a:off x="603504" y="1883664"/>
+            <a:ext cx="10972800" cy="585216"/>
+          </a:xfrm>
+          <a:prstGeom prst="rect">
+            <a:avLst/>
+          </a:prstGeom>
+          <a:noFill/>
+        </p:spPr>
+        <p:txBody>
+          <a:bodyPr wrap="square" anchor="t" lIns="45720" rIns="45720" tIns="27432" bIns="27432">
+            <a:normAutofit/>
+          </a:bodyPr>
+          <a:lstStyle/>
+          <a:p>
+            <a:pPr algn="l"/>
+            <a:r>
+              <a:rPr sz="850" b="1">
+                <a:solidFill>
+                  <a:srgbClr val="B7860B"/>
+                </a:solidFill>
+                <a:latin typeface="Inter"/>
+              </a:rPr>
+              <a:t>LA REGLA DEL RETO</a:t>
+            </a:r>
+          </a:p>
+          <a:p>
+            <a:pPr algn="l"/>
+            <a:r>
+              <a:rPr sz="1100">
+                <a:solidFill>
+                  <a:srgbClr val="20242E"/>
+                </a:solidFill>
+                <a:latin typeface="Inter"/>
+              </a:rPr>
+              <a:t>Geen scheldwoorden, geen dreigementen, geen uitroeptekens. Elke nota bevat twee imperatieven én één zin die de ander gelijk geeft («entiendo que…»).</a:t>
+            </a:r>
+          </a:p>
+        </p:txBody>
+      </p:sp>
+      <p:sp>
+        <p:nvSpPr>
+          <p:cNvPr id="11" name="Tarjeta 0"/>
+          <p:cNvSpPr/>
+          <p:nvPr/>
+        </p:nvSpPr>
+        <p:spPr>
+          <a:xfrm>
+            <a:off x="457200" y="2670048"/>
+            <a:ext cx="2708910" cy="898398"/>
+          </a:xfrm>
+          <a:prstGeom prst="roundRect">
+            <a:avLst>
+              <a:gd name="adj" fmla="val 6000"/>
+            </a:avLst>
+          </a:prstGeom>
+          <a:solidFill>
+            <a:srgbClr val="FFFFFF"/>
+          </a:solidFill>
+          <a:ln w="12700">
+            <a:solidFill>
+              <a:srgbClr val="E4E3DE"/>
+            </a:solidFill>
+          </a:ln>
+          <a:effectLst/>
+        </p:spPr>
+        <p:style>
+          <a:lnRef idx="1">
+            <a:schemeClr val="accent1"/>
+          </a:lnRef>
+          <a:fillRef idx="3">
+            <a:schemeClr val="accent1"/>
+          </a:fillRef>
+          <a:effectRef idx="2">
+            <a:schemeClr val="accent1"/>
+          </a:effectRef>
+          <a:fontRef idx="minor">
+            <a:schemeClr val="lt1"/>
+          </a:fontRef>
+        </p:style>
+        <p:txBody>
+          <a:bodyPr rtlCol="0" anchor="ctr"/>
+          <a:lstStyle/>
+          <a:p/>
+        </p:txBody>
+      </p:sp>
+      <p:sp>
+        <p:nvSpPr>
+          <p:cNvPr id="12" name="TarjetaTxt 0"/>
+          <p:cNvSpPr txBox="1"/>
+          <p:nvPr/>
+        </p:nvSpPr>
+        <p:spPr>
+          <a:xfrm>
+            <a:off x="548640" y="2724912"/>
+            <a:ext cx="2526030" cy="788670"/>
+          </a:xfrm>
+          <a:prstGeom prst="rect">
+            <a:avLst/>
+          </a:prstGeom>
+          <a:noFill/>
+        </p:spPr>
+        <p:txBody>
+          <a:bodyPr wrap="square" anchor="t" lIns="45720" rIns="45720" tIns="27432" bIns="27432">
+            <a:normAutofit/>
+          </a:bodyPr>
+          <a:lstStyle/>
+          <a:p>
+            <a:pPr algn="l"/>
+            <a:r>
+              <a:rPr sz="1100" b="1">
+                <a:solidFill>
+                  <a:srgbClr val="157355"/>
+                </a:solidFill>
+                <a:latin typeface="Bricolage Grotesque"/>
+              </a:rPr>
+              <a:t>el vecino de arriba</a:t>
+            </a:r>
+          </a:p>
+          <a:p>
+            <a:pPr algn="l"/>
+            <a:r>
+              <a:rPr sz="1000">
+                <a:solidFill>
+                  <a:srgbClr val="20242E"/>
+                </a:solidFill>
+                <a:latin typeface="Inter"/>
+              </a:rPr>
+              <a:t>Ensaya la batería a las once de la noche.</a:t>
+            </a:r>
+          </a:p>
+        </p:txBody>
+      </p:sp>
+      <p:sp>
+        <p:nvSpPr>
+          <p:cNvPr id="13" name="Tarjeta 1"/>
+          <p:cNvSpPr/>
+          <p:nvPr/>
+        </p:nvSpPr>
+        <p:spPr>
+          <a:xfrm>
+            <a:off x="3312414" y="2670048"/>
+            <a:ext cx="2708910" cy="898398"/>
+          </a:xfrm>
+          <a:prstGeom prst="roundRect">
+            <a:avLst>
+              <a:gd name="adj" fmla="val 6000"/>
+            </a:avLst>
+          </a:prstGeom>
+          <a:solidFill>
+            <a:srgbClr val="FFFFFF"/>
+          </a:solidFill>
+          <a:ln w="12700">
+            <a:solidFill>
+              <a:srgbClr val="E4E3DE"/>
+            </a:solidFill>
+          </a:ln>
+          <a:effectLst/>
+        </p:spPr>
+        <p:style>
+          <a:lnRef idx="1">
+            <a:schemeClr val="accent1"/>
+          </a:lnRef>
+          <a:fillRef idx="3">
+            <a:schemeClr val="accent1"/>
+          </a:fillRef>
+          <a:effectRef idx="2">
+            <a:schemeClr val="accent1"/>
+          </a:effectRef>
+          <a:fontRef idx="minor">
+            <a:schemeClr val="lt1"/>
+          </a:fontRef>
+        </p:style>
+        <p:txBody>
+          <a:bodyPr rtlCol="0" anchor="ctr"/>
+          <a:lstStyle/>
+          <a:p/>
+        </p:txBody>
+      </p:sp>
+      <p:sp>
+        <p:nvSpPr>
+          <p:cNvPr id="14" name="TarjetaTxt 1"/>
+          <p:cNvSpPr txBox="1"/>
+          <p:nvPr/>
+        </p:nvSpPr>
+        <p:spPr>
+          <a:xfrm>
+            <a:off x="3403854" y="2724912"/>
+            <a:ext cx="2526030" cy="788670"/>
+          </a:xfrm>
+          <a:prstGeom prst="rect">
+            <a:avLst/>
+          </a:prstGeom>
+          <a:noFill/>
+        </p:spPr>
+        <p:txBody>
+          <a:bodyPr wrap="square" anchor="t" lIns="45720" rIns="45720" tIns="27432" bIns="27432">
+            <a:normAutofit/>
+          </a:bodyPr>
+          <a:lstStyle/>
+          <a:p>
+            <a:pPr algn="l"/>
+            <a:r>
+              <a:rPr sz="1100" b="1">
+                <a:solidFill>
+                  <a:srgbClr val="157355"/>
+                </a:solidFill>
+                <a:latin typeface="Bricolage Grotesque"/>
+              </a:rPr>
+              <a:t>el vecino de abajo</a:t>
+            </a:r>
+          </a:p>
+          <a:p>
+            <a:pPr algn="l"/>
+            <a:r>
+              <a:rPr sz="1000">
+                <a:solidFill>
+                  <a:srgbClr val="20242E"/>
+                </a:solidFill>
+                <a:latin typeface="Inter"/>
+              </a:rPr>
+              <a:t>Trabaja de noche y duerme de día. Le despierta todo.</a:t>
+            </a:r>
+          </a:p>
+        </p:txBody>
+      </p:sp>
+      <p:sp>
+        <p:nvSpPr>
+          <p:cNvPr id="15" name="Tarjeta 2"/>
+          <p:cNvSpPr/>
+          <p:nvPr/>
+        </p:nvSpPr>
+        <p:spPr>
+          <a:xfrm>
+            <a:off x="6167628" y="2670048"/>
+            <a:ext cx="2708910" cy="898398"/>
+          </a:xfrm>
+          <a:prstGeom prst="roundRect">
+            <a:avLst>
+              <a:gd name="adj" fmla="val 6000"/>
+            </a:avLst>
+          </a:prstGeom>
+          <a:solidFill>
+            <a:srgbClr val="FFFFFF"/>
+          </a:solidFill>
+          <a:ln w="12700">
+            <a:solidFill>
+              <a:srgbClr val="E4E3DE"/>
+            </a:solidFill>
+          </a:ln>
+          <a:effectLst/>
+        </p:spPr>
+        <p:style>
+          <a:lnRef idx="1">
+            <a:schemeClr val="accent1"/>
+          </a:lnRef>
+          <a:fillRef idx="3">
+            <a:schemeClr val="accent1"/>
+          </a:fillRef>
+          <a:effectRef idx="2">
+            <a:schemeClr val="accent1"/>
+          </a:effectRef>
+          <a:fontRef idx="minor">
+            <a:schemeClr val="lt1"/>
+          </a:fontRef>
+        </p:style>
+        <p:txBody>
+          <a:bodyPr rtlCol="0" anchor="ctr"/>
+          <a:lstStyle/>
+          <a:p/>
+        </p:txBody>
+      </p:sp>
+      <p:sp>
+        <p:nvSpPr>
+          <p:cNvPr id="16" name="TarjetaTxt 2"/>
+          <p:cNvSpPr txBox="1"/>
+          <p:nvPr/>
+        </p:nvSpPr>
+        <p:spPr>
+          <a:xfrm>
+            <a:off x="6259068" y="2724912"/>
+            <a:ext cx="2526030" cy="788670"/>
+          </a:xfrm>
+          <a:prstGeom prst="rect">
+            <a:avLst/>
+          </a:prstGeom>
+          <a:noFill/>
+        </p:spPr>
+        <p:txBody>
+          <a:bodyPr wrap="square" anchor="t" lIns="45720" rIns="45720" tIns="27432" bIns="27432">
+            <a:normAutofit/>
+          </a:bodyPr>
+          <a:lstStyle/>
+          <a:p>
+            <a:pPr algn="l"/>
+            <a:r>
+              <a:rPr sz="1100" b="1">
+                <a:solidFill>
+                  <a:srgbClr val="157355"/>
+                </a:solidFill>
+                <a:latin typeface="Bricolage Grotesque"/>
+              </a:rPr>
+              <a:t>imperativo</a:t>
+            </a:r>
+          </a:p>
+          <a:p>
+            <a:pPr algn="l"/>
+            <a:r>
+              <a:rPr sz="1000">
+                <a:solidFill>
+                  <a:srgbClr val="20242E"/>
+                </a:solidFill>
+                <a:latin typeface="Inter"/>
+              </a:rPr>
+              <a:t>baja</a:t>
+            </a:r>
+          </a:p>
+        </p:txBody>
+      </p:sp>
+      <p:sp>
+        <p:nvSpPr>
+          <p:cNvPr id="17" name="Tarjeta 3"/>
+          <p:cNvSpPr/>
+          <p:nvPr/>
+        </p:nvSpPr>
+        <p:spPr>
+          <a:xfrm>
+            <a:off x="9022842" y="2670048"/>
+            <a:ext cx="2708910" cy="898398"/>
+          </a:xfrm>
+          <a:prstGeom prst="roundRect">
+            <a:avLst>
+              <a:gd name="adj" fmla="val 6000"/>
+            </a:avLst>
+          </a:prstGeom>
+          <a:solidFill>
+            <a:srgbClr val="FFFFFF"/>
+          </a:solidFill>
+          <a:ln w="12700">
+            <a:solidFill>
+              <a:srgbClr val="E4E3DE"/>
+            </a:solidFill>
+          </a:ln>
+          <a:effectLst/>
+        </p:spPr>
+        <p:style>
+          <a:lnRef idx="1">
+            <a:schemeClr val="accent1"/>
+          </a:lnRef>
+          <a:fillRef idx="3">
+            <a:schemeClr val="accent1"/>
+          </a:fillRef>
+          <a:effectRef idx="2">
+            <a:schemeClr val="accent1"/>
+          </a:effectRef>
+          <a:fontRef idx="minor">
+            <a:schemeClr val="lt1"/>
+          </a:fontRef>
+        </p:style>
+        <p:txBody>
+          <a:bodyPr rtlCol="0" anchor="ctr"/>
+          <a:lstStyle/>
+          <a:p/>
+        </p:txBody>
+      </p:sp>
+      <p:sp>
+        <p:nvSpPr>
+          <p:cNvPr id="18" name="TarjetaTxt 3"/>
+          <p:cNvSpPr txBox="1"/>
+          <p:nvPr/>
+        </p:nvSpPr>
+        <p:spPr>
+          <a:xfrm>
+            <a:off x="9114282" y="2724912"/>
+            <a:ext cx="2526030" cy="788670"/>
+          </a:xfrm>
+          <a:prstGeom prst="rect">
+            <a:avLst/>
+          </a:prstGeom>
+          <a:noFill/>
+        </p:spPr>
+        <p:txBody>
+          <a:bodyPr wrap="square" anchor="t" lIns="45720" rIns="45720" tIns="27432" bIns="27432">
+            <a:normAutofit/>
+          </a:bodyPr>
+          <a:lstStyle/>
+          <a:p>
+            <a:pPr algn="l"/>
+            <a:r>
+              <a:rPr sz="1100" b="1">
+                <a:solidFill>
+                  <a:srgbClr val="157355"/>
+                </a:solidFill>
+                <a:latin typeface="Bricolage Grotesque"/>
+              </a:rPr>
+              <a:t>imperativo</a:t>
+            </a:r>
+          </a:p>
+          <a:p>
+            <a:pPr algn="l"/>
+            <a:r>
+              <a:rPr sz="1000">
+                <a:solidFill>
+                  <a:srgbClr val="20242E"/>
+                </a:solidFill>
+                <a:latin typeface="Inter"/>
+              </a:rPr>
+              <a:t>pon</a:t>
+            </a:r>
+          </a:p>
+        </p:txBody>
+      </p:sp>
+      <p:sp>
+        <p:nvSpPr>
+          <p:cNvPr id="19" name="Tarjeta 4"/>
+          <p:cNvSpPr/>
+          <p:nvPr/>
+        </p:nvSpPr>
+        <p:spPr>
+          <a:xfrm>
+            <a:off x="457200" y="3696462"/>
+            <a:ext cx="2708910" cy="898398"/>
+          </a:xfrm>
+          <a:prstGeom prst="roundRect">
+            <a:avLst>
+              <a:gd name="adj" fmla="val 6000"/>
+            </a:avLst>
+          </a:prstGeom>
+          <a:solidFill>
+            <a:srgbClr val="FFFFFF"/>
+          </a:solidFill>
+          <a:ln w="12700">
+            <a:solidFill>
+              <a:srgbClr val="E4E3DE"/>
+            </a:solidFill>
+          </a:ln>
+          <a:effectLst/>
+        </p:spPr>
+        <p:style>
+          <a:lnRef idx="1">
+            <a:schemeClr val="accent1"/>
+          </a:lnRef>
+          <a:fillRef idx="3">
+            <a:schemeClr val="accent1"/>
+          </a:fillRef>
+          <a:effectRef idx="2">
+            <a:schemeClr val="accent1"/>
+          </a:effectRef>
+          <a:fontRef idx="minor">
+            <a:schemeClr val="lt1"/>
+          </a:fontRef>
+        </p:style>
+        <p:txBody>
+          <a:bodyPr rtlCol="0" anchor="ctr"/>
+          <a:lstStyle/>
+          <a:p/>
+        </p:txBody>
+      </p:sp>
+      <p:sp>
+        <p:nvSpPr>
+          <p:cNvPr id="20" name="TarjetaTxt 4"/>
+          <p:cNvSpPr txBox="1"/>
+          <p:nvPr/>
+        </p:nvSpPr>
+        <p:spPr>
+          <a:xfrm>
+            <a:off x="548640" y="3751326"/>
+            <a:ext cx="2526030" cy="788670"/>
+          </a:xfrm>
+          <a:prstGeom prst="rect">
+            <a:avLst/>
+          </a:prstGeom>
+          <a:noFill/>
+        </p:spPr>
+        <p:txBody>
+          <a:bodyPr wrap="square" anchor="t" lIns="45720" rIns="45720" tIns="27432" bIns="27432">
+            <a:normAutofit/>
+          </a:bodyPr>
+          <a:lstStyle/>
+          <a:p>
+            <a:pPr algn="l"/>
+            <a:r>
+              <a:rPr sz="1100" b="1">
+                <a:solidFill>
+                  <a:srgbClr val="157355"/>
+                </a:solidFill>
+                <a:latin typeface="Bricolage Grotesque"/>
+              </a:rPr>
+              <a:t>imperativo</a:t>
+            </a:r>
+          </a:p>
+          <a:p>
+            <a:pPr algn="l"/>
+            <a:r>
+              <a:rPr sz="1000">
+                <a:solidFill>
+                  <a:srgbClr val="20242E"/>
+                </a:solidFill>
+                <a:latin typeface="Inter"/>
+              </a:rPr>
+              <a:t>avisa</a:t>
+            </a:r>
+          </a:p>
+        </p:txBody>
+      </p:sp>
+      <p:sp>
+        <p:nvSpPr>
+          <p:cNvPr id="21" name="Tarjeta 5"/>
+          <p:cNvSpPr/>
+          <p:nvPr/>
+        </p:nvSpPr>
+        <p:spPr>
+          <a:xfrm>
+            <a:off x="3312414" y="3696462"/>
+            <a:ext cx="2708910" cy="898398"/>
+          </a:xfrm>
+          <a:prstGeom prst="roundRect">
+            <a:avLst>
+              <a:gd name="adj" fmla="val 6000"/>
+            </a:avLst>
+          </a:prstGeom>
+          <a:solidFill>
+            <a:srgbClr val="FFFFFF"/>
+          </a:solidFill>
+          <a:ln w="12700">
+            <a:solidFill>
+              <a:srgbClr val="E4E3DE"/>
+            </a:solidFill>
+          </a:ln>
+          <a:effectLst/>
+        </p:spPr>
+        <p:style>
+          <a:lnRef idx="1">
+            <a:schemeClr val="accent1"/>
+          </a:lnRef>
+          <a:fillRef idx="3">
+            <a:schemeClr val="accent1"/>
+          </a:fillRef>
+          <a:effectRef idx="2">
+            <a:schemeClr val="accent1"/>
+          </a:effectRef>
+          <a:fontRef idx="minor">
+            <a:schemeClr val="lt1"/>
+          </a:fontRef>
+        </p:style>
+        <p:txBody>
+          <a:bodyPr rtlCol="0" anchor="ctr"/>
+          <a:lstStyle/>
+          <a:p/>
+        </p:txBody>
+      </p:sp>
+      <p:sp>
+        <p:nvSpPr>
+          <p:cNvPr id="22" name="TarjetaTxt 5"/>
+          <p:cNvSpPr txBox="1"/>
+          <p:nvPr/>
+        </p:nvSpPr>
+        <p:spPr>
+          <a:xfrm>
+            <a:off x="3403854" y="3751326"/>
+            <a:ext cx="2526030" cy="788670"/>
+          </a:xfrm>
+          <a:prstGeom prst="rect">
+            <a:avLst/>
+          </a:prstGeom>
+          <a:noFill/>
+        </p:spPr>
+        <p:txBody>
+          <a:bodyPr wrap="square" anchor="t" lIns="45720" rIns="45720" tIns="27432" bIns="27432">
+            <a:normAutofit/>
+          </a:bodyPr>
+          <a:lstStyle/>
+          <a:p>
+            <a:pPr algn="l"/>
+            <a:r>
+              <a:rPr sz="1100" b="1">
+                <a:solidFill>
+                  <a:srgbClr val="157355"/>
+                </a:solidFill>
+                <a:latin typeface="Bricolage Grotesque"/>
+              </a:rPr>
+              <a:t>imperativo</a:t>
+            </a:r>
+          </a:p>
+          <a:p>
+            <a:pPr algn="l"/>
+            <a:r>
+              <a:rPr sz="1000">
+                <a:solidFill>
+                  <a:srgbClr val="20242E"/>
+                </a:solidFill>
+                <a:latin typeface="Inter"/>
+              </a:rPr>
+              <a:t>llama</a:t>
+            </a:r>
+          </a:p>
+        </p:txBody>
+      </p:sp>
+      <p:sp>
+        <p:nvSpPr>
+          <p:cNvPr id="23" name="Tarjeta 6"/>
+          <p:cNvSpPr/>
+          <p:nvPr/>
+        </p:nvSpPr>
+        <p:spPr>
+          <a:xfrm>
+            <a:off x="6167628" y="3696462"/>
+            <a:ext cx="2708910" cy="898398"/>
+          </a:xfrm>
+          <a:prstGeom prst="roundRect">
+            <a:avLst>
+              <a:gd name="adj" fmla="val 6000"/>
+            </a:avLst>
+          </a:prstGeom>
+          <a:solidFill>
+            <a:srgbClr val="FFFFFF"/>
+          </a:solidFill>
+          <a:ln w="12700">
+            <a:solidFill>
+              <a:srgbClr val="E4E3DE"/>
+            </a:solidFill>
+          </a:ln>
+          <a:effectLst/>
+        </p:spPr>
+        <p:style>
+          <a:lnRef idx="1">
+            <a:schemeClr val="accent1"/>
+          </a:lnRef>
+          <a:fillRef idx="3">
+            <a:schemeClr val="accent1"/>
+          </a:fillRef>
+          <a:effectRef idx="2">
+            <a:schemeClr val="accent1"/>
+          </a:effectRef>
+          <a:fontRef idx="minor">
+            <a:schemeClr val="lt1"/>
+          </a:fontRef>
+        </p:style>
+        <p:txBody>
+          <a:bodyPr rtlCol="0" anchor="ctr"/>
+          <a:lstStyle/>
+          <a:p/>
+        </p:txBody>
+      </p:sp>
+      <p:sp>
+        <p:nvSpPr>
+          <p:cNvPr id="24" name="TarjetaTxt 6"/>
+          <p:cNvSpPr txBox="1"/>
+          <p:nvPr/>
+        </p:nvSpPr>
+        <p:spPr>
+          <a:xfrm>
+            <a:off x="6259068" y="3751326"/>
+            <a:ext cx="2526030" cy="788670"/>
+          </a:xfrm>
+          <a:prstGeom prst="rect">
+            <a:avLst/>
+          </a:prstGeom>
+          <a:noFill/>
+        </p:spPr>
+        <p:txBody>
+          <a:bodyPr wrap="square" anchor="t" lIns="45720" rIns="45720" tIns="27432" bIns="27432">
+            <a:normAutofit/>
+          </a:bodyPr>
+          <a:lstStyle/>
+          <a:p>
+            <a:pPr algn="l"/>
+            <a:r>
+              <a:rPr sz="1100" b="1">
+                <a:solidFill>
+                  <a:srgbClr val="157355"/>
+                </a:solidFill>
+                <a:latin typeface="Bricolage Grotesque"/>
+              </a:rPr>
+              <a:t>imperativo</a:t>
+            </a:r>
+          </a:p>
+          <a:p>
+            <a:pPr algn="l"/>
+            <a:r>
+              <a:rPr sz="1000">
+                <a:solidFill>
+                  <a:srgbClr val="20242E"/>
+                </a:solidFill>
+                <a:latin typeface="Inter"/>
+              </a:rPr>
+              <a:t>espera</a:t>
+            </a:r>
+          </a:p>
+        </p:txBody>
+      </p:sp>
+      <p:sp>
+        <p:nvSpPr>
+          <p:cNvPr id="25" name="Tarjeta 7"/>
+          <p:cNvSpPr/>
+          <p:nvPr/>
+        </p:nvSpPr>
+        <p:spPr>
+          <a:xfrm>
+            <a:off x="9022842" y="3696462"/>
+            <a:ext cx="2708910" cy="898398"/>
+          </a:xfrm>
+          <a:prstGeom prst="roundRect">
+            <a:avLst>
+              <a:gd name="adj" fmla="val 6000"/>
+            </a:avLst>
+          </a:prstGeom>
+          <a:solidFill>
+            <a:srgbClr val="FFFFFF"/>
+          </a:solidFill>
+          <a:ln w="12700">
+            <a:solidFill>
+              <a:srgbClr val="E4E3DE"/>
+            </a:solidFill>
+          </a:ln>
+          <a:effectLst/>
+        </p:spPr>
+        <p:style>
+          <a:lnRef idx="1">
+            <a:schemeClr val="accent1"/>
+          </a:lnRef>
+          <a:fillRef idx="3">
+            <a:schemeClr val="accent1"/>
+          </a:fillRef>
+          <a:effectRef idx="2">
+            <a:schemeClr val="accent1"/>
+          </a:effectRef>
+          <a:fontRef idx="minor">
+            <a:schemeClr val="lt1"/>
+          </a:fontRef>
+        </p:style>
+        <p:txBody>
+          <a:bodyPr rtlCol="0" anchor="ctr"/>
+          <a:lstStyle/>
+          <a:p/>
+        </p:txBody>
+      </p:sp>
+      <p:sp>
+        <p:nvSpPr>
+          <p:cNvPr id="26" name="TarjetaTxt 7"/>
+          <p:cNvSpPr txBox="1"/>
+          <p:nvPr/>
+        </p:nvSpPr>
+        <p:spPr>
+          <a:xfrm>
+            <a:off x="9114282" y="3751326"/>
+            <a:ext cx="2526030" cy="788670"/>
+          </a:xfrm>
+          <a:prstGeom prst="rect">
+            <a:avLst/>
+          </a:prstGeom>
+          <a:noFill/>
+        </p:spPr>
+        <p:txBody>
+          <a:bodyPr wrap="square" anchor="t" lIns="45720" rIns="45720" tIns="27432" bIns="27432">
+            <a:normAutofit/>
+          </a:bodyPr>
+          <a:lstStyle/>
+          <a:p>
+            <a:pPr algn="l"/>
+            <a:r>
+              <a:rPr sz="1100" b="1">
+                <a:solidFill>
+                  <a:srgbClr val="157355"/>
+                </a:solidFill>
+                <a:latin typeface="Bricolage Grotesque"/>
+              </a:rPr>
+              <a:t>imperativo</a:t>
+            </a:r>
+          </a:p>
+          <a:p>
+            <a:pPr algn="l"/>
+            <a:r>
+              <a:rPr sz="1000">
+                <a:solidFill>
+                  <a:srgbClr val="20242E"/>
+                </a:solidFill>
+                <a:latin typeface="Inter"/>
+              </a:rPr>
+              <a:t>ven</a:t>
+            </a:r>
+          </a:p>
+        </p:txBody>
+      </p:sp>
+      <p:sp>
+        <p:nvSpPr>
+          <p:cNvPr id="27" name="Tarjeta 8"/>
+          <p:cNvSpPr/>
+          <p:nvPr/>
+        </p:nvSpPr>
+        <p:spPr>
+          <a:xfrm>
+            <a:off x="457200" y="4722876"/>
+            <a:ext cx="2708910" cy="898398"/>
+          </a:xfrm>
+          <a:prstGeom prst="roundRect">
+            <a:avLst>
+              <a:gd name="adj" fmla="val 6000"/>
+            </a:avLst>
+          </a:prstGeom>
+          <a:solidFill>
+            <a:srgbClr val="FFFFFF"/>
+          </a:solidFill>
+          <a:ln w="12700">
+            <a:solidFill>
+              <a:srgbClr val="E4E3DE"/>
+            </a:solidFill>
+          </a:ln>
+          <a:effectLst/>
+        </p:spPr>
+        <p:style>
+          <a:lnRef idx="1">
+            <a:schemeClr val="accent1"/>
+          </a:lnRef>
+          <a:fillRef idx="3">
+            <a:schemeClr val="accent1"/>
+          </a:fillRef>
+          <a:effectRef idx="2">
+            <a:schemeClr val="accent1"/>
+          </a:effectRef>
+          <a:fontRef idx="minor">
+            <a:schemeClr val="lt1"/>
+          </a:fontRef>
+        </p:style>
+        <p:txBody>
+          <a:bodyPr rtlCol="0" anchor="ctr"/>
+          <a:lstStyle/>
+          <a:p/>
+        </p:txBody>
+      </p:sp>
+      <p:sp>
+        <p:nvSpPr>
+          <p:cNvPr id="28" name="TarjetaTxt 8"/>
+          <p:cNvSpPr txBox="1"/>
+          <p:nvPr/>
+        </p:nvSpPr>
+        <p:spPr>
+          <a:xfrm>
+            <a:off x="548640" y="4777740"/>
+            <a:ext cx="2526030" cy="788670"/>
+          </a:xfrm>
+          <a:prstGeom prst="rect">
+            <a:avLst/>
+          </a:prstGeom>
+          <a:noFill/>
+        </p:spPr>
+        <p:txBody>
+          <a:bodyPr wrap="square" anchor="t" lIns="45720" rIns="45720" tIns="27432" bIns="27432">
+            <a:normAutofit/>
+          </a:bodyPr>
+          <a:lstStyle/>
+          <a:p>
+            <a:pPr algn="l"/>
+            <a:r>
+              <a:rPr sz="1100" b="1">
+                <a:solidFill>
+                  <a:srgbClr val="157355"/>
+                </a:solidFill>
+                <a:latin typeface="Bricolage Grotesque"/>
+              </a:rPr>
+              <a:t>imperativo</a:t>
+            </a:r>
+          </a:p>
+          <a:p>
+            <a:pPr algn="l"/>
+            <a:r>
+              <a:rPr sz="1000">
+                <a:solidFill>
+                  <a:srgbClr val="20242E"/>
+                </a:solidFill>
+                <a:latin typeface="Inter"/>
+              </a:rPr>
+              <a:t>dime</a:t>
+            </a:r>
+          </a:p>
+        </p:txBody>
+      </p:sp>
+      <p:sp>
+        <p:nvSpPr>
+          <p:cNvPr id="29" name="Tarjeta 9"/>
+          <p:cNvSpPr/>
+          <p:nvPr/>
+        </p:nvSpPr>
+        <p:spPr>
+          <a:xfrm>
+            <a:off x="3312414" y="4722876"/>
+            <a:ext cx="2708910" cy="898398"/>
+          </a:xfrm>
+          <a:prstGeom prst="roundRect">
+            <a:avLst>
+              <a:gd name="adj" fmla="val 6000"/>
+            </a:avLst>
+          </a:prstGeom>
+          <a:solidFill>
+            <a:srgbClr val="FFFFFF"/>
+          </a:solidFill>
+          <a:ln w="12700">
+            <a:solidFill>
+              <a:srgbClr val="E4E3DE"/>
+            </a:solidFill>
+          </a:ln>
+          <a:effectLst/>
+        </p:spPr>
+        <p:style>
+          <a:lnRef idx="1">
+            <a:schemeClr val="accent1"/>
+          </a:lnRef>
+          <a:fillRef idx="3">
+            <a:schemeClr val="accent1"/>
+          </a:fillRef>
+          <a:effectRef idx="2">
+            <a:schemeClr val="accent1"/>
+          </a:effectRef>
+          <a:fontRef idx="minor">
+            <a:schemeClr val="lt1"/>
+          </a:fontRef>
+        </p:style>
+        <p:txBody>
+          <a:bodyPr rtlCol="0" anchor="ctr"/>
+          <a:lstStyle/>
+          <a:p/>
+        </p:txBody>
+      </p:sp>
+      <p:sp>
+        <p:nvSpPr>
+          <p:cNvPr id="30" name="TarjetaTxt 9"/>
+          <p:cNvSpPr txBox="1"/>
+          <p:nvPr/>
+        </p:nvSpPr>
+        <p:spPr>
+          <a:xfrm>
+            <a:off x="3403854" y="4777740"/>
+            <a:ext cx="2526030" cy="788670"/>
+          </a:xfrm>
+          <a:prstGeom prst="rect">
+            <a:avLst/>
+          </a:prstGeom>
+          <a:noFill/>
+        </p:spPr>
+        <p:txBody>
+          <a:bodyPr wrap="square" anchor="t" lIns="45720" rIns="45720" tIns="27432" bIns="27432">
+            <a:normAutofit/>
+          </a:bodyPr>
+          <a:lstStyle/>
+          <a:p>
+            <a:pPr algn="l"/>
+            <a:r>
+              <a:rPr sz="1100" b="1">
+                <a:solidFill>
+                  <a:srgbClr val="157355"/>
+                </a:solidFill>
+                <a:latin typeface="Bricolage Grotesque"/>
+              </a:rPr>
+              <a:t>imperativo</a:t>
+            </a:r>
+          </a:p>
+          <a:p>
+            <a:pPr algn="l"/>
+            <a:r>
+              <a:rPr sz="1000">
+                <a:solidFill>
+                  <a:srgbClr val="20242E"/>
+                </a:solidFill>
+                <a:latin typeface="Inter"/>
+              </a:rPr>
+              <a:t>perdona</a:t>
+            </a:r>
+          </a:p>
+        </p:txBody>
+      </p:sp>
+      <p:sp>
+        <p:nvSpPr>
+          <p:cNvPr id="31" name="Tarjeta 10"/>
+          <p:cNvSpPr/>
+          <p:nvPr/>
+        </p:nvSpPr>
+        <p:spPr>
+          <a:xfrm>
+            <a:off x="6167628" y="4722876"/>
+            <a:ext cx="2708910" cy="898398"/>
+          </a:xfrm>
+          <a:prstGeom prst="roundRect">
+            <a:avLst>
+              <a:gd name="adj" fmla="val 6000"/>
+            </a:avLst>
+          </a:prstGeom>
+          <a:solidFill>
+            <a:srgbClr val="FFFFFF"/>
+          </a:solidFill>
+          <a:ln w="12700">
+            <a:solidFill>
+              <a:srgbClr val="E4E3DE"/>
+            </a:solidFill>
+          </a:ln>
+          <a:effectLst/>
+        </p:spPr>
+        <p:style>
+          <a:lnRef idx="1">
+            <a:schemeClr val="accent1"/>
+          </a:lnRef>
+          <a:fillRef idx="3">
+            <a:schemeClr val="accent1"/>
+          </a:fillRef>
+          <a:effectRef idx="2">
+            <a:schemeClr val="accent1"/>
+          </a:effectRef>
+          <a:fontRef idx="minor">
+            <a:schemeClr val="lt1"/>
+          </a:fontRef>
+        </p:style>
+        <p:txBody>
+          <a:bodyPr rtlCol="0" anchor="ctr"/>
+          <a:lstStyle/>
+          <a:p/>
+        </p:txBody>
+      </p:sp>
+      <p:sp>
+        <p:nvSpPr>
+          <p:cNvPr id="32" name="TarjetaTxt 10"/>
+          <p:cNvSpPr txBox="1"/>
+          <p:nvPr/>
+        </p:nvSpPr>
+        <p:spPr>
+          <a:xfrm>
+            <a:off x="6259068" y="4777740"/>
+            <a:ext cx="2526030" cy="788670"/>
+          </a:xfrm>
+          <a:prstGeom prst="rect">
+            <a:avLst/>
+          </a:prstGeom>
+          <a:noFill/>
+        </p:spPr>
+        <p:txBody>
+          <a:bodyPr wrap="square" anchor="t" lIns="45720" rIns="45720" tIns="27432" bIns="27432">
+            <a:normAutofit/>
+          </a:bodyPr>
+          <a:lstStyle/>
+          <a:p>
+            <a:pPr algn="l"/>
+            <a:r>
+              <a:rPr sz="1100" b="1">
+                <a:solidFill>
+                  <a:srgbClr val="157355"/>
+                </a:solidFill>
+                <a:latin typeface="Bricolage Grotesque"/>
+              </a:rPr>
+              <a:t>cortesía</a:t>
+            </a:r>
+          </a:p>
+          <a:p>
+            <a:pPr algn="l"/>
+            <a:r>
+              <a:rPr sz="1000">
+                <a:solidFill>
+                  <a:srgbClr val="20242E"/>
+                </a:solidFill>
+                <a:latin typeface="Inter"/>
+              </a:rPr>
+              <a:t>Entiendo que …</a:t>
+            </a:r>
+          </a:p>
+        </p:txBody>
+      </p:sp>
+      <p:sp>
+        <p:nvSpPr>
+          <p:cNvPr id="33" name="Tarjeta 11"/>
+          <p:cNvSpPr/>
+          <p:nvPr/>
+        </p:nvSpPr>
+        <p:spPr>
+          <a:xfrm>
+            <a:off x="9022842" y="4722876"/>
+            <a:ext cx="2708910" cy="898398"/>
+          </a:xfrm>
+          <a:prstGeom prst="roundRect">
+            <a:avLst>
+              <a:gd name="adj" fmla="val 6000"/>
+            </a:avLst>
+          </a:prstGeom>
+          <a:solidFill>
+            <a:srgbClr val="FFFFFF"/>
+          </a:solidFill>
+          <a:ln w="12700">
+            <a:solidFill>
+              <a:srgbClr val="E4E3DE"/>
+            </a:solidFill>
+          </a:ln>
+          <a:effectLst/>
+        </p:spPr>
+        <p:style>
+          <a:lnRef idx="1">
+            <a:schemeClr val="accent1"/>
+          </a:lnRef>
+          <a:fillRef idx="3">
+            <a:schemeClr val="accent1"/>
+          </a:fillRef>
+          <a:effectRef idx="2">
+            <a:schemeClr val="accent1"/>
+          </a:effectRef>
+          <a:fontRef idx="minor">
+            <a:schemeClr val="lt1"/>
+          </a:fontRef>
+        </p:style>
+        <p:txBody>
+          <a:bodyPr rtlCol="0" anchor="ctr"/>
+          <a:lstStyle/>
+          <a:p/>
+        </p:txBody>
+      </p:sp>
+      <p:sp>
+        <p:nvSpPr>
+          <p:cNvPr id="34" name="TarjetaTxt 11"/>
+          <p:cNvSpPr txBox="1"/>
+          <p:nvPr/>
+        </p:nvSpPr>
+        <p:spPr>
+          <a:xfrm>
+            <a:off x="9114282" y="4777740"/>
+            <a:ext cx="2526030" cy="788670"/>
+          </a:xfrm>
+          <a:prstGeom prst="rect">
+            <a:avLst/>
+          </a:prstGeom>
+          <a:noFill/>
+        </p:spPr>
+        <p:txBody>
+          <a:bodyPr wrap="square" anchor="t" lIns="45720" rIns="45720" tIns="27432" bIns="27432">
+            <a:normAutofit/>
+          </a:bodyPr>
+          <a:lstStyle/>
+          <a:p>
+            <a:pPr algn="l"/>
+            <a:r>
+              <a:rPr sz="1100" b="1">
+                <a:solidFill>
+                  <a:srgbClr val="157355"/>
+                </a:solidFill>
+                <a:latin typeface="Bricolage Grotesque"/>
+              </a:rPr>
+              <a:t>cortesía</a:t>
+            </a:r>
+          </a:p>
+          <a:p>
+            <a:pPr algn="l"/>
+            <a:r>
+              <a:rPr sz="1000">
+                <a:solidFill>
+                  <a:srgbClr val="20242E"/>
+                </a:solidFill>
+                <a:latin typeface="Inter"/>
+              </a:rPr>
+              <a:t>No es nada personal, pero …</a:t>
+            </a:r>
+          </a:p>
+        </p:txBody>
+      </p:sp>
+      <p:sp>
+        <p:nvSpPr>
+          <p:cNvPr id="35" name="Tarjeta 12"/>
+          <p:cNvSpPr/>
+          <p:nvPr/>
+        </p:nvSpPr>
+        <p:spPr>
+          <a:xfrm>
+            <a:off x="457200" y="5749290"/>
+            <a:ext cx="2708910" cy="898398"/>
+          </a:xfrm>
+          <a:prstGeom prst="roundRect">
+            <a:avLst>
+              <a:gd name="adj" fmla="val 6000"/>
+            </a:avLst>
+          </a:prstGeom>
+          <a:solidFill>
+            <a:srgbClr val="FFFFFF"/>
+          </a:solidFill>
+          <a:ln w="12700">
+            <a:solidFill>
+              <a:srgbClr val="E4E3DE"/>
+            </a:solidFill>
+          </a:ln>
+          <a:effectLst/>
+        </p:spPr>
+        <p:style>
+          <a:lnRef idx="1">
+            <a:schemeClr val="accent1"/>
+          </a:lnRef>
+          <a:fillRef idx="3">
+            <a:schemeClr val="accent1"/>
+          </a:fillRef>
+          <a:effectRef idx="2">
+            <a:schemeClr val="accent1"/>
+          </a:effectRef>
+          <a:fontRef idx="minor">
+            <a:schemeClr val="lt1"/>
+          </a:fontRef>
+        </p:style>
+        <p:txBody>
+          <a:bodyPr rtlCol="0" anchor="ctr"/>
+          <a:lstStyle/>
+          <a:p/>
+        </p:txBody>
+      </p:sp>
+      <p:sp>
+        <p:nvSpPr>
+          <p:cNvPr id="36" name="TarjetaTxt 12"/>
+          <p:cNvSpPr txBox="1"/>
+          <p:nvPr/>
+        </p:nvSpPr>
+        <p:spPr>
+          <a:xfrm>
+            <a:off x="548640" y="5804154"/>
+            <a:ext cx="2526030" cy="788670"/>
+          </a:xfrm>
+          <a:prstGeom prst="rect">
+            <a:avLst/>
+          </a:prstGeom>
+          <a:noFill/>
+        </p:spPr>
+        <p:txBody>
+          <a:bodyPr wrap="square" anchor="t" lIns="45720" rIns="45720" tIns="27432" bIns="27432">
+            <a:normAutofit/>
+          </a:bodyPr>
+          <a:lstStyle/>
+          <a:p>
+            <a:pPr algn="l"/>
+            <a:r>
+              <a:rPr sz="1100" b="1">
+                <a:solidFill>
+                  <a:srgbClr val="157355"/>
+                </a:solidFill>
+                <a:latin typeface="Bricolage Grotesque"/>
+              </a:rPr>
+              <a:t>cortesía</a:t>
+            </a:r>
+          </a:p>
+          <a:p>
+            <a:pPr algn="l"/>
+            <a:r>
+              <a:rPr sz="1000">
+                <a:solidFill>
+                  <a:srgbClr val="20242E"/>
+                </a:solidFill>
+                <a:latin typeface="Inter"/>
+              </a:rPr>
+              <a:t>¿Te parece bien si …?</a:t>
+            </a:r>
+          </a:p>
+        </p:txBody>
+      </p:sp>
+      <p:sp>
+        <p:nvSpPr>
+          <p:cNvPr id="37" name="Tarjeta 13"/>
+          <p:cNvSpPr/>
+          <p:nvPr/>
+        </p:nvSpPr>
+        <p:spPr>
+          <a:xfrm>
+            <a:off x="3312414" y="5749290"/>
+            <a:ext cx="2708910" cy="898398"/>
+          </a:xfrm>
+          <a:prstGeom prst="roundRect">
+            <a:avLst>
+              <a:gd name="adj" fmla="val 6000"/>
+            </a:avLst>
+          </a:prstGeom>
+          <a:solidFill>
+            <a:srgbClr val="FFFFFF"/>
+          </a:solidFill>
+          <a:ln w="12700">
+            <a:solidFill>
+              <a:srgbClr val="E4E3DE"/>
+            </a:solidFill>
+          </a:ln>
+          <a:effectLst/>
+        </p:spPr>
+        <p:style>
+          <a:lnRef idx="1">
+            <a:schemeClr val="accent1"/>
+          </a:lnRef>
+          <a:fillRef idx="3">
+            <a:schemeClr val="accent1"/>
+          </a:fillRef>
+          <a:effectRef idx="2">
+            <a:schemeClr val="accent1"/>
+          </a:effectRef>
+          <a:fontRef idx="minor">
+            <a:schemeClr val="lt1"/>
+          </a:fontRef>
+        </p:style>
+        <p:txBody>
+          <a:bodyPr rtlCol="0" anchor="ctr"/>
+          <a:lstStyle/>
+          <a:p/>
+        </p:txBody>
+      </p:sp>
+      <p:sp>
+        <p:nvSpPr>
+          <p:cNvPr id="38" name="TarjetaTxt 13"/>
+          <p:cNvSpPr txBox="1"/>
+          <p:nvPr/>
+        </p:nvSpPr>
+        <p:spPr>
+          <a:xfrm>
+            <a:off x="3403854" y="5804154"/>
+            <a:ext cx="2526030" cy="788670"/>
+          </a:xfrm>
+          <a:prstGeom prst="rect">
+            <a:avLst/>
+          </a:prstGeom>
+          <a:noFill/>
+        </p:spPr>
+        <p:txBody>
+          <a:bodyPr wrap="square" anchor="t" lIns="45720" rIns="45720" tIns="27432" bIns="27432">
+            <a:normAutofit/>
+          </a:bodyPr>
+          <a:lstStyle/>
+          <a:p>
+            <a:pPr algn="l"/>
+            <a:r>
+              <a:rPr sz="1100" b="1">
+                <a:solidFill>
+                  <a:srgbClr val="157355"/>
+                </a:solidFill>
+                <a:latin typeface="Bricolage Grotesque"/>
+              </a:rPr>
+              <a:t>cortesía</a:t>
+            </a:r>
+          </a:p>
+          <a:p>
+            <a:pPr algn="l"/>
+            <a:r>
+              <a:rPr sz="1000">
+                <a:solidFill>
+                  <a:srgbClr val="20242E"/>
+                </a:solidFill>
+                <a:latin typeface="Inter"/>
+              </a:rPr>
+              <a:t>Gracias por entenderlo.</a:t>
+            </a:r>
+          </a:p>
+        </p:txBody>
+      </p:sp>
+      <p:sp>
+        <p:nvSpPr>
+          <p:cNvPr id="39" name="Tarjeta 14"/>
+          <p:cNvSpPr/>
+          <p:nvPr/>
+        </p:nvSpPr>
+        <p:spPr>
+          <a:xfrm>
+            <a:off x="6167628" y="5749290"/>
+            <a:ext cx="2708910" cy="898398"/>
+          </a:xfrm>
+          <a:prstGeom prst="roundRect">
+            <a:avLst>
+              <a:gd name="adj" fmla="val 6000"/>
+            </a:avLst>
+          </a:prstGeom>
+          <a:solidFill>
+            <a:srgbClr val="FFFFFF"/>
+          </a:solidFill>
+          <a:ln w="12700">
+            <a:solidFill>
+              <a:srgbClr val="E4E3DE"/>
+            </a:solidFill>
+          </a:ln>
+          <a:effectLst/>
+        </p:spPr>
+        <p:style>
+          <a:lnRef idx="1">
+            <a:schemeClr val="accent1"/>
+          </a:lnRef>
+          <a:fillRef idx="3">
+            <a:schemeClr val="accent1"/>
+          </a:fillRef>
+          <a:effectRef idx="2">
+            <a:schemeClr val="accent1"/>
+          </a:effectRef>
+          <a:fontRef idx="minor">
+            <a:schemeClr val="lt1"/>
+          </a:fontRef>
+        </p:style>
+        <p:txBody>
+          <a:bodyPr rtlCol="0" anchor="ctr"/>
+          <a:lstStyle/>
+          <a:p/>
+        </p:txBody>
+      </p:sp>
+      <p:sp>
+        <p:nvSpPr>
+          <p:cNvPr id="40" name="TarjetaTxt 14"/>
+          <p:cNvSpPr txBox="1"/>
+          <p:nvPr/>
+        </p:nvSpPr>
+        <p:spPr>
+          <a:xfrm>
+            <a:off x="6259068" y="5804154"/>
+            <a:ext cx="2526030" cy="788670"/>
+          </a:xfrm>
+          <a:prstGeom prst="rect">
+            <a:avLst/>
+          </a:prstGeom>
+          <a:noFill/>
+        </p:spPr>
+        <p:txBody>
+          <a:bodyPr wrap="square" anchor="t" lIns="45720" rIns="45720" tIns="27432" bIns="27432">
+            <a:normAutofit/>
+          </a:bodyPr>
+          <a:lstStyle/>
+          <a:p>
+            <a:pPr algn="l"/>
+            <a:r>
+              <a:rPr sz="1100" b="1">
+                <a:solidFill>
+                  <a:srgbClr val="157355"/>
+                </a:solidFill>
+                <a:latin typeface="Bricolage Grotesque"/>
+              </a:rPr>
+              <a:t>cortesía</a:t>
+            </a:r>
+          </a:p>
+          <a:p>
+            <a:pPr algn="l"/>
+            <a:r>
+              <a:rPr sz="1000">
+                <a:solidFill>
+                  <a:srgbClr val="20242E"/>
+                </a:solidFill>
+                <a:latin typeface="Inter"/>
+              </a:rPr>
+              <a:t>Si te molesta algo mío, dímelo.</a:t>
             </a:r>
           </a:p>
         </p:txBody>
